--- a/Bases de Datos II/Clases/Clase 1 - Revision BD I y modelo de datos/Presentacion.pptx
+++ b/Bases de Datos II/Clases/Clase 1 - Revision BD I y modelo de datos/Presentacion.pptx
@@ -7,8 +7,8 @@
   <p:sldIdLst>
     <p:sldId id="256" r:id="rId7"/>
     <p:sldId id="257" r:id="rId8"/>
-    <p:sldId id="258" r:id="rId10"/>
-    <p:sldId id="259" r:id="rId11"/>
+    <p:sldId id="258" r:id="rId9"/>
+    <p:sldId id="259" r:id="rId10"/>
     <p:sldId id="260" r:id="rId12"/>
     <p:sldId id="261" r:id="rId13"/>
     <p:sldId id="262" r:id="rId14"/>
@@ -526,43 +526,77 @@
           <a:lstStyle/>
           <a:p>
             <a:r>
-              <a:t>TEXTO COMPLETO DE LA LÁMINA (se proyecta resumido):</a:t>
-            </a:r>
-          </a:p>
-          <a:p/>
-          <a:p>
-            <a:r>
-              <a:t>Tema de hoy: Revision BD I · Arranque la base de la clínica</a:t>
-            </a:r>
-          </a:p>
-          <a:p/>
-          <a:p>
-            <a:r>
-              <a:t>Herramienta: draw.io + DB Fiddle · Bloque 120 min</a:t>
-            </a:r>
-          </a:p>
-          <a:p/>
-          <a:p>
-            <a:r>
-              <a:t>Gratis + navegador · free tier · sin software de pago obligatorio.</a:t>
-            </a:r>
-          </a:p>
-          <a:p/>
-          <a:p>
-            <a:r>
-              <a:t>Recorrido: teoría del tema, una lámina por concepto, y demo del docente sobre la base de la clínica.</a:t>
-            </a:r>
-          </a:p>
-          <a:p/>
-          <a:p>
-            <a:r>
-              <a:t>Cada lámina se sostiene sola: sirve para repasar aunque hayas faltado.</a:t>
-            </a:r>
-          </a:p>
-          <a:p/>
-          <a:p>
-            <a:r>
-              <a:t>Conceptos de hoy: Por que esto no es Bases de Datos I, y el vocabulario minimo · Nivel conceptual y nivel fisico · El patron de tabla · El JOIN de tres tablas.</a:t>
+              <a:t>DESARROLLO (para explicarlo, no se proyecta):</a:t>
+            </a:r>
+          </a:p>
+          <a:p>
+            <a:r>
+              <a:t>La administracion reporta tres problemas y conviene enunciarlos tal cual, porque cada uno se traduce despues en una decision de esquema: se extravian fichas de pacientes</a:t>
+            </a:r>
+          </a:p>
+          <a:p>
+            <a:r>
+              <a:t>Y esa es la razon de que el expediente tenga que vivir en una fila con clave primaria y no en un papel; buscar un historial en el archivo fisico genera filas en la sala de espera</a:t>
+            </a:r>
+          </a:p>
+          <a:p>
+            <a:r>
+              <a:t>Que es el motivo por el que en la Clase 7 se habla de indices y no como un tema abstracto de rendimiento; y no hay metricas, no saben cuantas especies atienden al mes.</a:t>
+            </a:r>
+          </a:p>
+          <a:p>
+            <a:r>
+              <a:t>NOTAS:</a:t>
+            </a:r>
+          </a:p>
+          <a:p>
+            <a:r>
+              <a:t>Antes de dibujar una sola tabla hay que decir para quien se dibuja.</a:t>
+            </a:r>
+          </a:p>
+          <a:p>
+            <a:r>
+              <a:t>Hay que fijar la nomenclatura en voz alta porque el material la usa con precision y el estudiante la mezcla: la clínica es la CLINICA, es decir el cliente que tiene el problema; la clínica es el SISTEMA que se le construye, y la base de la clínica es concretamente la base de datos de ese sistema, que es lo que se hace en esta asignatura.</a:t>
+            </a:r>
+          </a:p>
+          <a:p>
+            <a:r>
+              <a:t>Programacion II construye la aplicacion para el mismo cliente y Seminario disena sus planos, asi que un estudiante que curse dos de las tres materias trabaja el mismo caso desde dos angulos.</a:t>
+            </a:r>
+          </a:p>
+          <a:p>
+            <a:r>
+              <a:t>La frontera de hoy conviene decirla de forma explicita para cortar la ansiedad: aqui no se pide la aplicacion ni la interfaz, se pide la capa de datos, y por eso el producto del semestre es un esquema con integridad, roles, procedimientos y un plan de ejecucion, no una pantalla.</a:t>
+            </a:r>
+          </a:p>
+          <a:p>
+            <a:r>
+              <a:t>Los tres interesados son la herramienta de decision mas util que se le puede dar hoy al estudiante, y estan en la diapositiva por eso.</a:t>
+            </a:r>
+          </a:p>
+          <a:p>
+            <a:r>
+              <a:t>El dueno de la clinica quiere metricas del negocio.</a:t>
+            </a:r>
+          </a:p>
+          <a:p>
+            <a:r>
+              <a:t>La recepcionista quiere agendar rapido y con pocos clics.</a:t>
+            </a:r>
+          </a:p>
+          <a:p>
+            <a:r>
+              <a:t>El veterinario quiere el historial del paciente a la mano durante la consulta.</a:t>
+            </a:r>
+          </a:p>
+          <a:p>
+            <a:r>
+              <a:t>Lo importante, y hay que subrayarlo, es que esos intereses ENTRAN EN CONFLICTO: pedir mas datos en el formulario de la cita da mejores metricas al dueno y le hace mas lento el trabajo a la recepcionista.</a:t>
+            </a:r>
+          </a:p>
+          <a:p>
+            <a:r>
+              <a:t>Ahi esta la diferencia entre un modelo copiado y uno decidido.</a:t>
             </a:r>
           </a:p>
         </p:txBody>
@@ -637,37 +671,62 @@
           </a:p>
           <a:p>
             <a:r>
-              <a:t>Elegir tipos parece trivial y es donde se pagan las facturas mas caras del semestre.</a:t>
-            </a:r>
-          </a:p>
-          <a:p>
-            <a:r>
-              <a:t>Un telefono no es un numero: como NUMBER se pierden los ceros iniciales, no cabe el prefijo internacional ni una extension, asi que va VARCHAR(30).</a:t>
-            </a:r>
-          </a:p>
-          <a:p>
-            <a:r>
-              <a:t>Una fecha no es texto: si fecha_hora fuera VARCHAR(20), el ORDER BY seria alfabetico y no cronologico, no se podrian sumar treinta minutos para calcular el fin de la cita y el indice de la Clase 7 serviria de poco; va TIMESTAMP.</a:t>
-            </a:r>
-          </a:p>
-          <a:p>
-            <a:r>
-              <a:t>El dinero no es flotante: FLOAT representa decimales en binario y arrastra errores que, sumados en cientos de lineas de detalle_factura, hacen que el total no cuadre con sus partes; va NUMBER(12,2) en Oracle o DECIMAL(12,2) en PostgreSQL.</a:t>
-            </a:r>
-          </a:p>
-          <a:p>
-            <a:r>
-              <a:t>La tentacion contraria, declarar todo VARCHAR(4000) por comodidad, renuncia a que la base valide algo y traslada la validacion entera a quien programe cada pantalla.</a:t>
-            </a:r>
-          </a:p>
-          <a:p>
-            <a:r>
-              <a:t>Numeros de referencia como convencion del curso: nombre VARCHAR(80), email VARCHAR(120) porque el estandar de correo admite hasta 254 caracteres, telefono VARCHAR(30), especie VARCHAR(40).</a:t>
-            </a:r>
-          </a:p>
-          <a:p>
-            <a:r>
-              <a:t>El costo de equivocarse no es reescribir una linea: la tabla ya tiene datos, el ALTER TABLE debe convertir cada valor, puede fallar por una sola fila invalida, bloquea la tabla mientras dura, y los procedimientos de las Clases 3 y 4 ya asumen el tipo antiguo.</a:t>
+              <a:t>Todo en minusculas: PostgreSQL pliega a minuscula cualquier identificador sin comillas</a:t>
+            </a:r>
+          </a:p>
+          <a:p>
+            <a:r>
+              <a:t>Asi que escribir CREATE TABLE Mascota y despues consultarlo entrecomillado produce un error de tabla inexistente que cuesta veinte minutos de clase encontrar; la regla practica es no usar nunca comillas dobles en identificadores.</a:t>
+            </a:r>
+          </a:p>
+          <a:p>
+            <a:r>
+              <a:t>Nombres de tabla en singular y sin tildes ni enes: dueno, mascota, cita, veterinario, consulta, insumo, factura, detalle_factura.</a:t>
+            </a:r>
+          </a:p>
+          <a:p>
+            <a:r>
+              <a:t>Una tabla es un conjunto de entidades del mismo tipo, pero se nombra por lo que guarda cada fila, y el singular hace que la clave foranea se lea sola: cita.id_mascota apunta a mascota.id_mascota.</a:t>
+            </a:r>
+          </a:p>
+          <a:p>
+            <a:r>
+              <a:t>Palabras compuestas con guion bajo (detalle_factura, fecha_hora), nunca camelCase.</a:t>
+            </a:r>
+          </a:p>
+          <a:p>
+            <a:r>
+              <a:t>Y la convencion que mas tiempo ahorra en el semestre: el mismo nombre en el diagrama, en el DDL y en el codigo Mermaid; cuando los tres coinciden, el modelo se lee una sola vez.</a:t>
+            </a:r>
+          </a:p>
+          <a:p>
+            <a:r>
+              <a:t>Ejemplo del error mas comun: CREATE TABLE "Mascota" con comillas crea un nombre sensible a mayusculas, y despues SELECT * FROM mascota responde relation "mascota" does not exist.</a:t>
+            </a:r>
+          </a:p>
+          <a:p>
+            <a:r>
+              <a:t>Sin comillas, Mascota, MASCOTA y mascota son el mismo objeto.</a:t>
+            </a:r>
+          </a:p>
+          <a:p>
+            <a:r>
+              <a:t>NOTAS:</a:t>
+            </a:r>
+          </a:p>
+          <a:p>
+            <a:r>
+              <a:t>Convenciones de nombres del curso.</a:t>
+            </a:r>
+          </a:p>
+          <a:p>
+            <a:r>
+              <a:t>Identificadores sustitutos uniformes con el patron id_&lt;entidad&gt;, el mismo nombre en la tabla propia y en la que la referencia, para que el JOIN se escriba sin buscar como se llamo la columna alla.</a:t>
+            </a:r>
+          </a:p>
+          <a:p>
+            <a:r>
+              <a:t>Fuera de la lamina (habla de la practica): Convenciones de nombres del curso, y hay que exigirlas desde hoy porque el taller se corrige ejecutando el guion en el PostgreSQL que PostgreSQL en el navegador trae en el navegador.</a:t>
             </a:r>
           </a:p>
         </p:txBody>
@@ -742,42 +801,17 @@
           </a:p>
           <a:p>
             <a:r>
-              <a:t>Todo en minusculas: PostgreSQL pliega a minuscula cualquier identificador sin comillas</a:t>
-            </a:r>
-          </a:p>
-          <a:p>
-            <a:r>
-              <a:t>Asi que escribir CREATE TABLE Mascota y despues consultarlo entrecomillado produce un error de tabla inexistente que cuesta veinte minutos de clase encontrar; la regla practica es no usar nunca comillas dobles en identificadores.</a:t>
-            </a:r>
-          </a:p>
-          <a:p>
-            <a:r>
-              <a:t>Nombres de tabla en singular y sin tildes ni enes: dueno, mascota, cita, veterinario, consulta, insumo, factura, detalle_factura.</a:t>
-            </a:r>
-          </a:p>
-          <a:p>
-            <a:r>
-              <a:t>Una tabla es un conjunto de entidades del mismo tipo, pero se nombra por lo que guarda cada fila, y el singular hace que la clave foranea se lea sola: cita.id_mascota apunta a mascota.id_mascota.</a:t>
-            </a:r>
-          </a:p>
-          <a:p>
-            <a:r>
-              <a:t>Palabras compuestas con guion bajo (detalle_factura, fecha_hora), nunca camelCase.</a:t>
-            </a:r>
-          </a:p>
-          <a:p>
-            <a:r>
-              <a:t>Y la convencion que mas tiempo ahorra en el semestre: el mismo nombre en el diagrama, en el DDL y en el codigo Mermaid; cuando los tres coinciden, el modelo se lee una sola vez.</a:t>
-            </a:r>
-          </a:p>
-          <a:p>
-            <a:r>
-              <a:t>Ejemplo del error mas comun: CREATE TABLE "Mascota" con comillas crea un nombre sensible a mayusculas, y despues SELECT * FROM mascota responde relation "mascota" does not exist.</a:t>
-            </a:r>
-          </a:p>
-          <a:p>
-            <a:r>
-              <a:t>Sin comillas, Mascota, MASCOTA y mascota son el mismo objeto.</a:t>
+              <a:t>Tambien se demuestra el borrado en cascada: DELETE FROM factura WHERE id_factura = 1 y verificar con SELECT COUNT(*) FROM detalle_factura que las lineas hijas desaparecieron.</a:t>
+            </a:r>
+          </a:p>
+          <a:p>
+            <a:r>
+              <a:t>DB Fiddle: es un PostgreSQL real en el navegador que ejecuta el DDL y muestra el error exacto si algo no compila.</a:t>
+            </a:r>
+          </a:p>
+          <a:p>
+            <a:r>
+              <a:t>Un visor Mermaid: convierte el texto erDiagram en el diagrama, y ese texto es la fuente que se versiona junto al DDL.</a:t>
             </a:r>
           </a:p>
           <a:p>
@@ -787,17 +821,32 @@
           </a:p>
           <a:p>
             <a:r>
-              <a:t>Convenciones de nombres del curso.</a:t>
-            </a:r>
-          </a:p>
-          <a:p>
-            <a:r>
-              <a:t>Identificadores sustitutos uniformes con el patron id_&lt;entidad&gt;, el mismo nombre en la tabla propia y en la que la referencia, para que el JOIN se escriba sin buscar como se llamo la columna alla.</a:t>
-            </a:r>
-          </a:p>
-          <a:p>
-            <a:r>
-              <a:t>Fuera de la lamina (habla de la practica): Convenciones de nombres del curso, y hay que exigirlas desde hoy porque el taller se corrige ejecutando el guion en el PostgreSQL que PostgreSQL en el navegador trae en el navegador.</a:t>
+              <a:t>Sobre lo que se puede demostrar con herramientas gratuitas conviene ser preciso.</a:t>
+            </a:r>
+          </a:p>
+          <a:p>
+            <a:r>
+              <a:t>En DB Fiddle, sin cuenta y en menos de un minuto, se ejecuta el guion completo de CREATE TABLE con claves primarias, foraneas y CHECK, se insertan Ana Perez, Luna y su cita, se corre el JOIN de las tres tablas y, sobre todo, se provoca el error de integridad en vivo insertando una cita con id_mascota inexistente para que el grupo lea el mensaje real del motor.</a:t>
+            </a:r>
+          </a:p>
+          <a:p>
+            <a:r>
+              <a:t>Lo que DB Fiddle no da es persistencia: cada ejecucion recrea el esquema desde cero y no hay usuarios ni roles reales, razon por la cual la Clase 2 trabaja con matriz documentada.</a:t>
+            </a:r>
+          </a:p>
+          <a:p>
+            <a:r>
+              <a:t>Oracle Live SQL exige cuenta gratuita pero conserva esquema y guiones entre sesiones y admite bloques PL/SQL, que es lo que se necesitara desde la Clase 3; conviene que el estudiante la cree hoy y no el dia que la necesite. draw.io corre en el navegador, no pide cuenta y exporta PNG, el formato que pide PostgreSQL en el navegador.</a:t>
+            </a:r>
+          </a:p>
+          <a:p>
+            <a:r>
+              <a:t>De ahi sale la regla operativa del curso: la fuente de verdad es el archivo sql en la carpeta del proyecto, nunca la pestana del navegador, y el estudiante va bien si reconstruye el esquema completo en menos de cinco minutos pegando su propio guion. draw.io y Excalidraw: son pizarras para pensar el modelo a mano alzada, sin instalar nada.</a:t>
+            </a:r>
+          </a:p>
+          <a:p>
+            <a:r>
+              <a:t>Fuera de la lamina (habla de la practica): Sobre lo que se puede demostrar con herramientas gratuitas conviene ser preciso, porque de eso depende que el taller no se atore.</a:t>
             </a:r>
           </a:p>
         </p:txBody>
@@ -872,17 +921,17 @@
           </a:p>
           <a:p>
             <a:r>
-              <a:t>Tambien se demuestra el borrado en cascada: DELETE FROM factura WHERE id_factura = 1 y verificar con SELECT COUNT(*) FROM detalle_factura que las lineas hijas desaparecieron.</a:t>
-            </a:r>
-          </a:p>
-          <a:p>
-            <a:r>
-              <a:t>DB Fiddle: es un PostgreSQL real en el navegador que ejecuta el DDL y muestra el error exacto si algo no compila.</a:t>
-            </a:r>
-          </a:p>
-          <a:p>
-            <a:r>
-              <a:t>Un visor Mermaid: convierte el texto erDiagram en el diagrama, y ese texto es la fuente que se versiona junto al DDL.</a:t>
+              <a:t>Un modelo ER en Mermaid NO es una imagen: es texto en sintaxis Mermaid (erDiagram) que un visor renderiza al instante.</a:t>
+            </a:r>
+          </a:p>
+          <a:p>
+            <a:r>
+              <a:t>La IA acierta la sintaxis; el modelo sigue siendo del estudiante, y por eso hay que revisar lo que devuelve: entidades completas, cardinalidades en el sentido correcto, PK y FK marcadas.</a:t>
+            </a:r>
+          </a:p>
+          <a:p>
+            <a:r>
+              <a:t>El paso que nadie se puede saltar es pegar el codigo en un visor Mermaid y mirarlo renderizado, porque un diagrama que no renderiza no comunica nada.</a:t>
             </a:r>
           </a:p>
           <a:p>
@@ -892,126 +941,6 @@
           </a:p>
           <a:p>
             <a:r>
-              <a:t>Sobre lo que se puede demostrar con herramientas gratuitas conviene ser preciso.</a:t>
-            </a:r>
-          </a:p>
-          <a:p>
-            <a:r>
-              <a:t>En DB Fiddle, sin cuenta y en menos de un minuto, se ejecuta el guion completo de CREATE TABLE con claves primarias, foraneas y CHECK, se insertan Ana Perez, Luna y su cita, se corre el JOIN de las tres tablas y, sobre todo, se provoca el error de integridad en vivo insertando una cita con id_mascota inexistente para que el grupo lea el mensaje real del motor.</a:t>
-            </a:r>
-          </a:p>
-          <a:p>
-            <a:r>
-              <a:t>Lo que DB Fiddle no da es persistencia: cada ejecucion recrea el esquema desde cero y no hay usuarios ni roles reales, razon por la cual la Clase 2 trabaja con matriz documentada.</a:t>
-            </a:r>
-          </a:p>
-          <a:p>
-            <a:r>
-              <a:t>Oracle Live SQL exige cuenta gratuita pero conserva esquema y guiones entre sesiones y admite bloques PL/SQL, que es lo que se necesitara desde la Clase 3; conviene que el estudiante la cree hoy y no el dia que la necesite. draw.io corre en el navegador, no pide cuenta y exporta PNG, el formato que pide PostgreSQL en el navegador.</a:t>
-            </a:r>
-          </a:p>
-          <a:p>
-            <a:r>
-              <a:t>De ahi sale la regla operativa del curso: la fuente de verdad es el archivo sql en la carpeta del proyecto, nunca la pestana del navegador, y el estudiante va bien si reconstruye el esquema completo en menos de cinco minutos pegando su propio guion. draw.io y Excalidraw: son pizarras para pensar el modelo a mano alzada, sin instalar nada.</a:t>
-            </a:r>
-          </a:p>
-          <a:p>
-            <a:r>
-              <a:t>Fuera de la lamina (habla de la practica): Sobre lo que se puede demostrar con herramientas gratuitas conviene ser preciso, porque de eso depende que el taller no se atore.</a:t>
-            </a:r>
-          </a:p>
-        </p:txBody>
-      </p:sp>
-      <p:sp>
-        <p:nvSpPr>
-          <p:cNvPr id="4" name="Slide Number Placeholder 3"/>
-          <p:cNvSpPr>
-            <a:spLocks noGrp="1"/>
-          </p:cNvSpPr>
-          <p:nvPr>
-            <p:ph type="sldNum" idx="5" sz="quarter"/>
-          </p:nvPr>
-        </p:nvSpPr>
-        <p:spPr/>
-      </p:sp>
-    </p:spTree>
-  </p:cSld>
-  <p:clrMapOvr>
-    <a:masterClrMapping/>
-  </p:clrMapOvr>
-</p:notes>
-</file>
-
-<file path=ppt/notesSlides/notesSlide13.xml><?xml version="1.0" encoding="utf-8"?>
-<p:notes xmlns:a="http://schemas.openxmlformats.org/drawingml/2006/main" xmlns:p="http://schemas.openxmlformats.org/presentationml/2006/main" xmlns:r="http://schemas.openxmlformats.org/officeDocument/2006/relationships">
-  <p:cSld>
-    <p:spTree>
-      <p:nvGrpSpPr>
-        <p:cNvPr id="1" name=""/>
-        <p:cNvGrpSpPr/>
-        <p:nvPr/>
-      </p:nvGrpSpPr>
-      <p:grpSpPr>
-        <a:xfrm>
-          <a:off x="0" y="0"/>
-          <a:ext cx="0" cy="0"/>
-          <a:chOff x="0" y="0"/>
-          <a:chExt cx="0" cy="0"/>
-        </a:xfrm>
-      </p:grpSpPr>
-      <p:sp>
-        <p:nvSpPr>
-          <p:cNvPr id="2" name="Slide Image Placeholder 1"/>
-          <p:cNvSpPr>
-            <a:spLocks noGrp="1"/>
-          </p:cNvSpPr>
-          <p:nvPr>
-            <p:ph type="sldImg" idx="2"/>
-          </p:nvPr>
-        </p:nvSpPr>
-        <p:spPr/>
-      </p:sp>
-      <p:sp>
-        <p:nvSpPr>
-          <p:cNvPr id="3" name="Notes Placeholder 2"/>
-          <p:cNvSpPr>
-            <a:spLocks noGrp="1"/>
-          </p:cNvSpPr>
-          <p:nvPr>
-            <p:ph type="body" idx="3" sz="quarter"/>
-          </p:nvPr>
-        </p:nvSpPr>
-        <p:spPr/>
-        <p:txBody>
-          <a:bodyPr/>
-          <a:lstStyle/>
-          <a:p>
-            <a:r>
-              <a:t>DESARROLLO (para explicarlo, no se proyecta):</a:t>
-            </a:r>
-          </a:p>
-          <a:p>
-            <a:r>
-              <a:t>Un modelo ER en Mermaid NO es una imagen: es texto en sintaxis Mermaid (erDiagram) que un visor renderiza al instante.</a:t>
-            </a:r>
-          </a:p>
-          <a:p>
-            <a:r>
-              <a:t>La IA acierta la sintaxis; el modelo sigue siendo del estudiante, y por eso hay que revisar lo que devuelve: entidades completas, cardinalidades en el sentido correcto, PK y FK marcadas.</a:t>
-            </a:r>
-          </a:p>
-          <a:p>
-            <a:r>
-              <a:t>El paso que nadie se puede saltar es pegar el codigo en un visor Mermaid y mirarlo renderizado, porque un diagrama que no renderiza no comunica nada.</a:t>
-            </a:r>
-          </a:p>
-          <a:p>
-            <a:r>
-              <a:t>NOTAS:</a:t>
-            </a:r>
-          </a:p>
-          <a:p>
-            <a:r>
               <a:t>Ultimo tramo.</a:t>
             </a:r>
           </a:p>
@@ -1078,106 +1007,6 @@
           <a:p>
             <a:r>
               <a:t>Fuera de la lamina (habla de la practica): Ultimo tramo, y es el que decide si el taller se entrega o no: como pasa el estudiante del dibujo a lo que la plataforma califica.</a:t>
-            </a:r>
-          </a:p>
-        </p:txBody>
-      </p:sp>
-      <p:sp>
-        <p:nvSpPr>
-          <p:cNvPr id="4" name="Slide Number Placeholder 3"/>
-          <p:cNvSpPr>
-            <a:spLocks noGrp="1"/>
-          </p:cNvSpPr>
-          <p:nvPr>
-            <p:ph type="sldNum" idx="5" sz="quarter"/>
-          </p:nvPr>
-        </p:nvSpPr>
-        <p:spPr/>
-      </p:sp>
-    </p:spTree>
-  </p:cSld>
-  <p:clrMapOvr>
-    <a:masterClrMapping/>
-  </p:clrMapOvr>
-</p:notes>
-</file>
-
-<file path=ppt/notesSlides/notesSlide14.xml><?xml version="1.0" encoding="utf-8"?>
-<p:notes xmlns:a="http://schemas.openxmlformats.org/drawingml/2006/main" xmlns:p="http://schemas.openxmlformats.org/presentationml/2006/main" xmlns:r="http://schemas.openxmlformats.org/officeDocument/2006/relationships">
-  <p:cSld>
-    <p:spTree>
-      <p:nvGrpSpPr>
-        <p:cNvPr id="1" name=""/>
-        <p:cNvGrpSpPr/>
-        <p:nvPr/>
-      </p:nvGrpSpPr>
-      <p:grpSpPr>
-        <a:xfrm>
-          <a:off x="0" y="0"/>
-          <a:ext cx="0" cy="0"/>
-          <a:chOff x="0" y="0"/>
-          <a:chExt cx="0" cy="0"/>
-        </a:xfrm>
-      </p:grpSpPr>
-      <p:sp>
-        <p:nvSpPr>
-          <p:cNvPr id="2" name="Slide Image Placeholder 1"/>
-          <p:cNvSpPr>
-            <a:spLocks noGrp="1"/>
-          </p:cNvSpPr>
-          <p:nvPr>
-            <p:ph type="sldImg" idx="2"/>
-          </p:nvPr>
-        </p:nvSpPr>
-        <p:spPr/>
-      </p:sp>
-      <p:sp>
-        <p:nvSpPr>
-          <p:cNvPr id="3" name="Notes Placeholder 2"/>
-          <p:cNvSpPr>
-            <a:spLocks noGrp="1"/>
-          </p:cNvSpPr>
-          <p:nvPr>
-            <p:ph type="body" idx="3" sz="quarter"/>
-          </p:nvPr>
-        </p:nvSpPr>
-        <p:spPr/>
-        <p:txBody>
-          <a:bodyPr/>
-          <a:lstStyle/>
-          <a:p>
-            <a:r>
-              <a:t>TEXTO COMPLETO DE LA LÁMINA (se proyecta resumido):</a:t>
-            </a:r>
-          </a:p>
-          <a:p/>
-          <a:p>
-            <a:r>
-              <a:t>Herramienta: draw.io + DB Fiddle</a:t>
-            </a:r>
-          </a:p>
-          <a:p/>
-          <a:p>
-            <a:r>
-              <a:t>Demo: Boceto ER en draw.io (Dueno-Mascota-Cita) + CREATE TABLE minimo en DB Fiddle, y cierre pasando el boceto a Mermaid con IA para pegarlo renderizado.</a:t>
-            </a:r>
-          </a:p>
-          <a:p/>
-          <a:p>
-            <a:r>
-              <a:t>Sigan el mismo dominio de la clínica (no inventen otro caso).</a:t>
-            </a:r>
-          </a:p>
-          <a:p/>
-          <a:p>
-            <a:r>
-              <a:t>Qué observar: la FK rechaza una cita para una mascota que no existe: el motor responde con violacion de clave foranea y no inserta nada.</a:t>
-            </a:r>
-          </a:p>
-          <a:p/>
-          <a:p>
-            <a:r>
-              <a:t>Qué observar: el mismo modelo en tres formas que deben coincidir: el boceto, el DDL que compila y el texto erDiagram.</a:t>
             </a:r>
           </a:p>
         </p:txBody>
@@ -1247,58 +1076,37 @@
           <a:lstStyle/>
           <a:p>
             <a:r>
-              <a:t>TEXTO COMPLETO DE LA LÁMINA (se proyecta resumido):</a:t>
-            </a:r>
-          </a:p>
-          <a:p/>
-          <a:p>
-            <a:r>
-              <a:t>la clínica Veterinaria (Cali): unas 150 citas al día, 16 veterinarios, ~5.000 mascotas de ~2.000 dueños — y todo en carpetas de papel.</a:t>
-            </a:r>
-          </a:p>
-          <a:p/>
-          <a:p>
-            <a:r>
-              <a:t>Duele en tres puntos: se extravían fichas, buscar un historial genera filas en la sala de espera, y no hay métricas.</a:t>
-            </a:r>
-          </a:p>
-          <a:p/>
-          <a:p>
-            <a:r>
-              <a:t>Tres personas van a usar el sistema, y esperan cosas distintas: el dueño métricas, la recepcionista agendar rápido, el veterinario el historial a la mano.</a:t>
-            </a:r>
-          </a:p>
-          <a:p/>
-          <a:p>
-            <a:r>
-              <a:t>Sus intereses entran en conflicto: más datos dan mejores métricas, pero hacen más lento el agendamiento. Ahí están las decisiones de diseño del semestre.</a:t>
-            </a:r>
-          </a:p>
-          <a:p/>
-          <a:p>
-            <a:r>
-              <a:t>El modelo de la clínica tiene 8 entidades y 3 reglas de negocio: dueño, mascota, veterinario, cita, consulta, insumo, factura y detalle de factura.</a:t>
-            </a:r>
-          </a:p>
-          <a:p/>
-          <a:p>
-            <a:r>
               <a:t>DESARROLLO (para explicarlo, no se proyecta):</a:t>
             </a:r>
           </a:p>
           <a:p>
             <a:r>
-              <a:t>La administracion reporta tres problemas y conviene enunciarlos tal cual, porque cada uno se traduce despues en una decision de esquema: se extravian fichas de pacientes</a:t>
-            </a:r>
-          </a:p>
-          <a:p>
-            <a:r>
-              <a:t>Y esa es la razon de que el expediente tenga que vivir en una fila con clave primaria y no en un papel; buscar un historial en el archivo fisico genera filas en la sala de espera</a:t>
-            </a:r>
-          </a:p>
-          <a:p>
-            <a:r>
-              <a:t>Que es el motivo por el que en la Clase 7 se habla de indices y no como un tema abstracto de rendimiento; y no hay metricas, no saben cuantas especies atienden al mes.</a:t>
+              <a:t>Alla el objetivo era escribir consultas que devolvieran el resultado correcto</a:t>
+            </a:r>
+          </a:p>
+          <a:p>
+            <a:r>
+              <a:t>Aqui es disenar un esquema que siga siendo correcto cuando lo usen tres personas distintas, cuando tenga cien mil filas y cuando alguien meta datos malos, a veces por error y a veces a proposito.</a:t>
+            </a:r>
+          </a:p>
+          <a:p>
+            <a:r>
+              <a:t>Una tabla, o relacion, es un conjunto de entidades del mismo tipo: mascota guarda mascotas y nada mas.</a:t>
+            </a:r>
+          </a:p>
+          <a:p>
+            <a:r>
+              <a:t>Una fila es una instancia concreta e irrepetible: la perra Luna de la duena Ana Perez.</a:t>
+            </a:r>
+          </a:p>
+          <a:p>
+            <a:r>
+              <a:t>Una columna es un atributo, y todo atributo tiene un dominio, el conjunto de valores que el motor considera legales: especie no acepta cualquier texto, acepta Canino, Felino, Ave u Otro.</a:t>
+            </a:r>
+          </a:p>
+          <a:p>
+            <a:r>
+              <a:t>Sobre estas tres nociones se monta el semestre: los roles de la Clase 2 se otorgan sobre tablas, los procedimientos de la Clase 3 validan columnas y los indices de la Clase 7 se crean sobre columnas concretas.</a:t>
             </a:r>
           </a:p>
           <a:p>
@@ -1308,52 +1116,17 @@
           </a:p>
           <a:p>
             <a:r>
-              <a:t>Antes de dibujar una sola tabla hay que decir para quien se dibuja.</a:t>
-            </a:r>
-          </a:p>
-          <a:p>
-            <a:r>
-              <a:t>Hay que fijar la nomenclatura en voz alta porque el material la usa con precision y el estudiante la mezcla: la clínica es la CLINICA, es decir el cliente que tiene el problema; la clínica es el SISTEMA que se le construye, y la base de la clínica es concretamente la base de datos de ese sistema, que es lo que se hace en esta asignatura.</a:t>
-            </a:r>
-          </a:p>
-          <a:p>
-            <a:r>
-              <a:t>Programacion II construye la aplicacion para el mismo cliente y Seminario disena sus planos, asi que un estudiante que curse dos de las tres materias trabaja el mismo caso desde dos angulos.</a:t>
-            </a:r>
-          </a:p>
-          <a:p>
-            <a:r>
-              <a:t>La frontera de hoy conviene decirla de forma explicita para cortar la ansiedad: aqui no se pide la aplicacion ni la interfaz, se pide la capa de datos, y por eso el producto del semestre es un esquema con integridad, roles, procedimientos y un plan de ejecucion, no una pantalla.</a:t>
-            </a:r>
-          </a:p>
-          <a:p>
-            <a:r>
-              <a:t>Los tres interesados son la herramienta de decision mas util que se le puede dar hoy al estudiante, y estan en la diapositiva por eso.</a:t>
-            </a:r>
-          </a:p>
-          <a:p>
-            <a:r>
-              <a:t>El dueno de la clinica quiere metricas del negocio.</a:t>
-            </a:r>
-          </a:p>
-          <a:p>
-            <a:r>
-              <a:t>La recepcionista quiere agendar rapido y con pocos clics.</a:t>
-            </a:r>
-          </a:p>
-          <a:p>
-            <a:r>
-              <a:t>El veterinario quiere el historial del paciente a la mano durante la consulta.</a:t>
-            </a:r>
-          </a:p>
-          <a:p>
-            <a:r>
-              <a:t>Lo importante, y hay que subrayarlo, es que esos intereses ENTRAN EN CONFLICTO: pedir mas datos en el formulario de la cita da mejores metricas al dueno y le hace mas lento el trabajo a la recepcionista.</a:t>
-            </a:r>
-          </a:p>
-          <a:p>
-            <a:r>
-              <a:t>Ahi esta la diferencia entre un modelo copiado y uno decidido.</a:t>
+              <a:t>Esta clase parece repetir Bases de Datos I y no lo hace.</a:t>
+            </a:r>
+          </a:p>
+          <a:p>
+            <a:r>
+              <a:t>Conviene fijar el vocabulario operativo antes de dibujar nada.</a:t>
+            </a:r>
+          </a:p>
+          <a:p>
+            <a:r>
+              <a:t>Conviene desactivar una trampa de vocabulario: la palabra dominio se usara hoy con dos sentidos, el de un atributo y el del proyecto, que es la clínica.</a:t>
             </a:r>
           </a:p>
         </p:txBody>
@@ -1428,32 +1201,22 @@
           </a:p>
           <a:p>
             <a:r>
-              <a:t>Alla el objetivo era escribir consultas que devolvieran el resultado correcto</a:t>
-            </a:r>
-          </a:p>
-          <a:p>
-            <a:r>
-              <a:t>Aqui es disenar un esquema que siga siendo correcto cuando lo usen tres personas distintas, cuando tenga cien mil filas y cuando alguien meta datos malos, a veces por error y a veces a proposito.</a:t>
-            </a:r>
-          </a:p>
-          <a:p>
-            <a:r>
-              <a:t>Una tabla, o relacion, es un conjunto de entidades del mismo tipo: mascota guarda mascotas y nada mas.</a:t>
-            </a:r>
-          </a:p>
-          <a:p>
-            <a:r>
-              <a:t>Una fila es una instancia concreta e irrepetible: la perra Luna de la duena Ana Perez.</a:t>
-            </a:r>
-          </a:p>
-          <a:p>
-            <a:r>
-              <a:t>Una columna es un atributo, y todo atributo tiene un dominio, el conjunto de valores que el motor considera legales: especie no acepta cualquier texto, acepta Canino, Felino, Ave u Otro.</a:t>
-            </a:r>
-          </a:p>
-          <a:p>
-            <a:r>
-              <a:t>Sobre estas tres nociones se monta el semestre: los roles de la Clase 2 se otorgan sobre tablas, los procedimientos de la Clase 3 validan columnas y los indices de la Clase 7 se crean sobre columnas concretas.</a:t>
+              <a:t>El nivel conceptual nombra entidades y relaciones con vocabulario de negocio y sin comprometerse con ningun motor: Dueno posee Mascota, Veterinario atiende Cita.</a:t>
+            </a:r>
+          </a:p>
+          <a:p>
+            <a:r>
+              <a:t>El nivel fisico convierte esas entidades en tablas con columnas tipadas, longitudes, restricciones y claves: dueno.telefono VARCHAR(30) NOT NULL.</a:t>
+            </a:r>
+          </a:p>
+          <a:p>
+            <a:r>
+              <a:t>Son dos vistas del MISMO modelo, no dos modelos distintos, y esa es la razon de que la clase produzca dos artefactos: el diagrama ER es la vista conceptual, y el guion CREATE TABLE es la misma informacion en fisico.</a:t>
+            </a:r>
+          </a:p>
+          <a:p>
+            <a:r>
+              <a:t>El criterio operativo para saber si el conceptual esta completo es exactamente ese: si otra persona puede escribir el fisico mirandolo, sin preguntar nada, esta completo.</a:t>
             </a:r>
           </a:p>
           <a:p>
@@ -1463,17 +1226,12 @@
           </a:p>
           <a:p>
             <a:r>
-              <a:t>Esta clase parece repetir Bases de Datos I y no lo hace.</a:t>
-            </a:r>
-          </a:p>
-          <a:p>
-            <a:r>
-              <a:t>Conviene fijar el vocabulario operativo antes de dibujar nada.</a:t>
-            </a:r>
-          </a:p>
-          <a:p>
-            <a:r>
-              <a:t>Conviene desactivar una trampa de vocabulario: la palabra dominio se usara hoy con dos sentidos, el de un atributo y el del proyecto, que es la clínica.</a:t>
+              <a:t>Antes de cualquier otra cosa hay que separar dos niveles que el estudiante mezcla y que hoy se recorren los dos.</a:t>
+            </a:r>
+          </a:p>
+          <a:p>
+            <a:r>
+              <a:t>Conviene decirlo en voz alta porque explica por que se exige tipo y longitud en el diagrama: no es decoracion, es lo que hace traducible el dibujo.</a:t>
             </a:r>
           </a:p>
         </p:txBody>
@@ -1548,22 +1306,32 @@
           </a:p>
           <a:p>
             <a:r>
-              <a:t>El nivel conceptual nombra entidades y relaciones con vocabulario de negocio y sin comprometerse con ningun motor: Dueno posee Mascota, Veterinario atiende Cita.</a:t>
-            </a:r>
-          </a:p>
-          <a:p>
-            <a:r>
-              <a:t>El nivel fisico convierte esas entidades en tablas con columnas tipadas, longitudes, restricciones y claves: dueno.telefono VARCHAR(30) NOT NULL.</a:t>
-            </a:r>
-          </a:p>
-          <a:p>
-            <a:r>
-              <a:t>Son dos vistas del MISMO modelo, no dos modelos distintos, y esa es la razon de que la clase produzca dos artefactos: el diagrama ER es la vista conceptual, y el guion CREATE TABLE es la misma informacion en fisico.</a:t>
-            </a:r>
-          </a:p>
-          <a:p>
-            <a:r>
-              <a:t>El criterio operativo para saber si el conceptual esta completo es exactamente ese: si otra persona puede escribir el fisico mirandolo, sin preguntar nada, esta completo.</a:t>
+              <a:t>La clave primaria es la columna, o el conjunto de columnas, que identifica una fila sin ambiguedad: no se repite y no admite nulos.</a:t>
+            </a:r>
+          </a:p>
+          <a:p>
+            <a:r>
+              <a:t>La pregunta de diseno real no es si poner clave primaria, sino cual.</a:t>
+            </a:r>
+          </a:p>
+          <a:p>
+            <a:r>
+              <a:t>Una clave natural es un atributo del mundo real que ya identifica la entidad: la cedula del dueno, el microchip de la mascota.</a:t>
+            </a:r>
+          </a:p>
+          <a:p>
+            <a:r>
+              <a:t>Una clave sustituta, o surrogate, es un numero sin significado de negocio que la base genera: id_dueno 1, 2, 3.</a:t>
+            </a:r>
+          </a:p>
+          <a:p>
+            <a:r>
+              <a:t>En la clínica pasan las tres cosas: el dueno llega sin cedula a la mano, un microchip se digita mal y hay que corregirlo, y una mascota rescatada no tiene microchip.</a:t>
+            </a:r>
+          </a:p>
+          <a:p>
+            <a:r>
+              <a:t>Regla citable, y es convencion de oficio, no regla dura: si el valor lo controla un tercero, el Estado o un fabricante, no lo use como clave primaria.</a:t>
             </a:r>
           </a:p>
           <a:p>
@@ -1573,12 +1341,32 @@
           </a:p>
           <a:p>
             <a:r>
-              <a:t>Antes de cualquier otra cosa hay que separar dos niveles que el estudiante mezcla y que hoy se recorren los dos.</a:t>
-            </a:r>
-          </a:p>
-          <a:p>
-            <a:r>
-              <a:t>Conviene decirlo en voz alta porque explica por que se exige tipo y longitud en el diagrama: no es decoracion, es lo que hace traducible el dibujo.</a:t>
+              <a:t>Eso no es estilo, es una restriccion que el motor verifica en cada INSERT y UPDATE y que rechaza con error.</a:t>
+            </a:r>
+          </a:p>
+          <a:p>
+            <a:r>
+              <a:t>La natural ahorra un JOIN cuando se busca por ella; la sustituta gana cuando el dato natural cambia, se repite o todavia no existe.</a:t>
+            </a:r>
+          </a:p>
+          <a:p>
+            <a:r>
+              <a:t>Por eso el esquema usa identificadores sustitutos y guarda el dato natural aparte con unicidad:.</a:t>
+            </a:r>
+          </a:p>
+          <a:p>
+            <a:r>
+              <a:t>UNIQUE impide dos duenos con la misma cedula, permite dejarla nula un rato y permite corregirla sin tocar las filas de mascota que apuntan al dueno.</a:t>
+            </a:r>
+          </a:p>
+          <a:p>
+            <a:r>
+              <a:t>CÓDIGO CITADO (referencia):</a:t>
+            </a:r>
+          </a:p>
+          <a:p>
+            <a:r>
+              <a:t>CREATE TABLE dueno (id_dueno INT PRIMARY KEY, cedula VARCHAR(20) UNIQUE, nombre VARCHAR(80) NOT NULL, telefono VARCHAR(30), email VARCHAR(120))</a:t>
             </a:r>
           </a:p>
         </p:txBody>
@@ -1653,32 +1441,52 @@
           </a:p>
           <a:p>
             <a:r>
-              <a:t>La clave primaria es la columna, o el conjunto de columnas, que identifica una fila sin ambiguedad: no se repite y no admite nulos.</a:t>
-            </a:r>
-          </a:p>
-          <a:p>
-            <a:r>
-              <a:t>La pregunta de diseno real no es si poner clave primaria, sino cual.</a:t>
-            </a:r>
-          </a:p>
-          <a:p>
-            <a:r>
-              <a:t>Una clave natural es un atributo del mundo real que ya identifica la entidad: la cedula del dueno, el microchip de la mascota.</a:t>
-            </a:r>
-          </a:p>
-          <a:p>
-            <a:r>
-              <a:t>Una clave sustituta, o surrogate, es un numero sin significado de negocio que la base genera: id_dueno 1, 2, 3.</a:t>
-            </a:r>
-          </a:p>
-          <a:p>
-            <a:r>
-              <a:t>En la clínica pasan las tres cosas: el dueno llega sin cedula a la mano, un microchip se digita mal y hay que corregirlo, y una mascota rescatada no tiene microchip.</a:t>
-            </a:r>
-          </a:p>
-          <a:p>
-            <a:r>
-              <a:t>Regla citable, y es convencion de oficio, no regla dura: si el valor lo controla un tercero, el Estado o un fabricante, no lo use como clave primaria.</a:t>
+              <a:t>La normalizacion se dicta mejor al reves de como se suele dictar: primero la enfermedad.</a:t>
+            </a:r>
+          </a:p>
+          <a:p>
+            <a:r>
+              <a:t>De actualizacion: cuando Ana Perez cambia de telefono hay que actualizar todas sus citas, y si una queda sin actualizar la base contiene dos verdades contradictorias.</a:t>
+            </a:r>
+          </a:p>
+          <a:p>
+            <a:r>
+              <a:t>De insercion: no se puede registrar un dueno nuevo hasta que tenga una cita, porque el dato solo vive en cita.</a:t>
+            </a:r>
+          </a:p>
+          <a:p>
+            <a:r>
+              <a:t>De borrado: al eliminar la ultima cita desaparece el telefono.</a:t>
+            </a:r>
+          </a:p>
+          <a:p>
+            <a:r>
+              <a:t>Primera: nada de listas en una celda; guardar 3001112233 y 3159998877 juntos obliga a buscar con SUBSTR, no se puede indexar y no se sabe cual esta vigente, luego se crea telefono_dueno.</a:t>
+            </a:r>
+          </a:p>
+          <a:p>
+            <a:r>
+              <a:t>Segunda: en detalle_factura, con clave compuesta (id_factura, id_insumo), un atributo como nombre_insumo depende solo de id_insumo y sale hacia insumo; en cambio precio_unitario se queda</a:t>
+            </a:r>
+          </a:p>
+          <a:p>
+            <a:r>
+              <a:t>Y este matiz separa a quien entendio de quien memorizo, porque no es redundancia sino el precio historico del momento de la venta: si el total se recalcula con el precio actual, reimprimir una factura de hace seis meses da otra cifra.</a:t>
+            </a:r>
+          </a:p>
+          <a:p>
+            <a:r>
+              <a:t>Tercera: si cita guardara especialidad_veterinario, ese atributo depende de id_veterinario y no de id_cita, luego sale hacia veterinario.</a:t>
+            </a:r>
+          </a:p>
+          <a:p>
+            <a:r>
+              <a:t>La tercera forma normal es el punto de parada practico en casi todo sistema transaccional</a:t>
+            </a:r>
+          </a:p>
+          <a:p>
+            <a:r>
+              <a:t>Y eso es convencion; se rompe a proposito cuando conviene, por ejemplo guardando el total ya calculado en factura, decision que se sostiene con un disparador de la Clase 4 y se justifica con planes de ejecucion en las Clases 6 y 7.</a:t>
             </a:r>
           </a:p>
           <a:p>
@@ -1688,32 +1496,17 @@
           </a:p>
           <a:p>
             <a:r>
-              <a:t>Eso no es estilo, es una restriccion que el motor verifica en cada INSERT y UPDATE y que rechaza con error.</a:t>
-            </a:r>
-          </a:p>
-          <a:p>
-            <a:r>
-              <a:t>La natural ahorra un JOIN cuando se busca por ella; la sustituta gana cuando el dato natural cambia, se repite o todavia no existe.</a:t>
-            </a:r>
-          </a:p>
-          <a:p>
-            <a:r>
-              <a:t>Por eso el esquema usa identificadores sustitutos y guarda el dato natural aparte con unicidad:.</a:t>
-            </a:r>
-          </a:p>
-          <a:p>
-            <a:r>
-              <a:t>UNIQUE impide dos duenos con la misma cedula, permite dejarla nula un rato y permite corregirla sin tocar las filas de mascota que apuntan al dueno.</a:t>
-            </a:r>
-          </a:p>
-          <a:p>
-            <a:r>
-              <a:t>CÓDIGO CITADO (referencia):</a:t>
-            </a:r>
-          </a:p>
-          <a:p>
-            <a:r>
-              <a:t>CREATE TABLE dueno (id_dueno INT PRIMARY KEY, cedula VARCHAR(20) UNIQUE, nombre VARCHAR(80) NOT NULL, telefono VARCHAR(30), email VARCHAR(120))</a:t>
+              <a:t>Supongamos que el estudiante guarda el telefono del dueno dentro de cada fila de cita.</a:t>
+            </a:r>
+          </a:p>
+          <a:p>
+            <a:r>
+              <a:t>Aparecen tres anomalias.</a:t>
+            </a:r>
+          </a:p>
+          <a:p>
+            <a:r>
+              <a:t>Leidas asi, las tres formas normales son tres vacunas.</a:t>
             </a:r>
           </a:p>
         </p:txBody>
@@ -1788,52 +1581,47 @@
           </a:p>
           <a:p>
             <a:r>
-              <a:t>La normalizacion se dicta mejor al reves de como se suele dictar: primero la enfermedad.</a:t>
-            </a:r>
-          </a:p>
-          <a:p>
-            <a:r>
-              <a:t>De actualizacion: cuando Ana Perez cambia de telefono hay que actualizar todas sus citas, y si una queda sin actualizar la base contiene dos verdades contradictorias.</a:t>
-            </a:r>
-          </a:p>
-          <a:p>
-            <a:r>
-              <a:t>De insercion: no se puede registrar un dueno nuevo hasta que tenga una cita, porque el dato solo vive en cita.</a:t>
-            </a:r>
-          </a:p>
-          <a:p>
-            <a:r>
-              <a:t>De borrado: al eliminar la ultima cita desaparece el telefono.</a:t>
-            </a:r>
-          </a:p>
-          <a:p>
-            <a:r>
-              <a:t>Primera: nada de listas en una celda; guardar 3001112233 y 3159998877 juntos obliga a buscar con SUBSTR, no se puede indexar y no se sabe cual esta vigente, luego se crea telefono_dueno.</a:t>
-            </a:r>
-          </a:p>
-          <a:p>
-            <a:r>
-              <a:t>Segunda: en detalle_factura, con clave compuesta (id_factura, id_insumo), un atributo como nombre_insumo depende solo de id_insumo y sale hacia insumo; en cambio precio_unitario se queda</a:t>
-            </a:r>
-          </a:p>
-          <a:p>
-            <a:r>
-              <a:t>Y este matiz separa a quien entendio de quien memorizo, porque no es redundancia sino el precio historico del momento de la venta: si el total se recalcula con el precio actual, reimprimir una factura de hace seis meses da otra cifra.</a:t>
-            </a:r>
-          </a:p>
-          <a:p>
-            <a:r>
-              <a:t>Tercera: si cita guardara especialidad_veterinario, ese atributo depende de id_veterinario y no de id_cita, luego sale hacia veterinario.</a:t>
-            </a:r>
-          </a:p>
-          <a:p>
-            <a:r>
-              <a:t>La tercera forma normal es el punto de parada practico en casi todo sistema transaccional</a:t>
-            </a:r>
-          </a:p>
-          <a:p>
-            <a:r>
-              <a:t>Y eso es convencion; se rompe a proposito cuando conviene, por ejemplo guardando el total ya calculado en factura, decision que se sostiene con un disparador de la Clase 4 y se justifica con planes de ejecucion en las Clases 6 y 7.</a:t>
+              <a:t>La clave foranea apunta a la clave primaria de otra tabla y su efecto practico es que el motor se niega a guardar una referencia inventada.</a:t>
+            </a:r>
+          </a:p>
+          <a:p>
+            <a:r>
+              <a:t>Si se intenta y la mascota 999 no existe, la sentencia falla y nombra la restriccion violada: eso es integridad referencial.</a:t>
+            </a:r>
+          </a:p>
+          <a:p>
+            <a:r>
+              <a:t>Si no se especifica nada, Oracle y PostgreSQL asumen el comportamiento restrictivo, y esa es regla dura del estandar, no convencion.</a:t>
+            </a:r>
+          </a:p>
+          <a:p>
+            <a:r>
+              <a:t>En la clínica se decide entidad por entidad: mascota hacia dueno restrictivo, porque borrar un dueno no debe evaporar el historial clinico; consulta hacia cita restrictivo</a:t>
+            </a:r>
+          </a:p>
+          <a:p>
+            <a:r>
+              <a:t>Porque la consulta es el registro medico; detalle_factura hacia factura en cascada, porque una linea de detalle no significa nada sin su factura; detalle_factura hacia insumo restrictivo, porque no se puede borrar un insumo ya facturado.</a:t>
+            </a:r>
+          </a:p>
+          <a:p>
+            <a:r>
+              <a:t>La conclusion honesta es que en produccion casi nada se borra: se marca inactivo con activa CHAR(1) DEFAULT 'S' CHECK (activa IN ('S','N')).</a:t>
+            </a:r>
+          </a:p>
+          <a:p>
+            <a:r>
+              <a:t>La accion ante el borrado del padre se declara en la propia FK: ON DELETE RESTRICT, o NO ACTION, que es la opcion por omision, impide borrar un dueno con mascotas</a:t>
+            </a:r>
+          </a:p>
+          <a:p>
+            <a:r>
+              <a:t>ON DELETE CASCADE borraria tambien sus mascotas y citas, que en una clinica es perder historia clinica</a:t>
+            </a:r>
+          </a:p>
+          <a:p>
+            <a:r>
+              <a:t>En la clínica la eleccion razonable es RESTRICT mas baja logica.</a:t>
             </a:r>
           </a:p>
           <a:p>
@@ -1843,17 +1631,37 @@
           </a:p>
           <a:p>
             <a:r>
-              <a:t>Supongamos que el estudiante guarda el telefono del dueno dentro de cada fila de cita.</a:t>
-            </a:r>
-          </a:p>
-          <a:p>
-            <a:r>
-              <a:t>Aparecen tres anomalias.</a:t>
-            </a:r>
-          </a:p>
-          <a:p>
-            <a:r>
-              <a:t>Leidas asi, las tres formas normales son tres vacunas.</a:t>
+              <a:t>Lo que casi nunca se explica es la otra mitad: que pasa al borrar el padre.</a:t>
+            </a:r>
+          </a:p>
+          <a:p>
+            <a:r>
+              <a:t>Al declarar la clave foranea se elige el comportamiento</a:t>
+            </a:r>
+          </a:p>
+          <a:p>
+            <a:r>
+              <a:t>RESTRICT o NO ACTION impide borrar el dueno mientras tenga mascotas, CASCADE borra las filas hijas en cadena y SET NULL deja la referencia nula.</a:t>
+            </a:r>
+          </a:p>
+          <a:p>
+            <a:r>
+              <a:t>Esa baja logica es la que obliga a validar en la Clase 3 que una mascota inactiva no agende, porque la clave foranea la sigue aceptando: el identificador existe, el negocio no lo quiere.</a:t>
+            </a:r>
+          </a:p>
+          <a:p>
+            <a:r>
+              <a:t>ON DELETE SET NULL deja la fila huerfana con la columna en nulo.</a:t>
+            </a:r>
+          </a:p>
+          <a:p>
+            <a:r>
+              <a:t>CÓDIGO CITADO (referencia):</a:t>
+            </a:r>
+          </a:p>
+          <a:p>
+            <a:r>
+              <a:t>INSERT INTO cita (id_cita, id_mascota, fecha_hora, estado) VALUES (101, 999, TIMESTAMP '2026-09-01 09:00:00', 'PROGRAMADA')</a:t>
             </a:r>
           </a:p>
         </p:txBody>
@@ -1928,47 +1736,22 @@
           </a:p>
           <a:p>
             <a:r>
-              <a:t>La clave foranea apunta a la clave primaria de otra tabla y su efecto practico es que el motor se niega a guardar una referencia inventada.</a:t>
-            </a:r>
-          </a:p>
-          <a:p>
-            <a:r>
-              <a:t>Si se intenta y la mascota 999 no existe, la sentencia falla y nombra la restriccion violada: eso es integridad referencial.</a:t>
-            </a:r>
-          </a:p>
-          <a:p>
-            <a:r>
-              <a:t>Si no se especifica nada, Oracle y PostgreSQL asumen el comportamiento restrictivo, y esa es regla dura del estandar, no convencion.</a:t>
-            </a:r>
-          </a:p>
-          <a:p>
-            <a:r>
-              <a:t>En la clínica se decide entidad por entidad: mascota hacia dueno restrictivo, porque borrar un dueno no debe evaporar el historial clinico; consulta hacia cita restrictivo</a:t>
-            </a:r>
-          </a:p>
-          <a:p>
-            <a:r>
-              <a:t>Porque la consulta es el registro medico; detalle_factura hacia factura en cascada, porque una linea de detalle no significa nada sin su factura; detalle_factura hacia insumo restrictivo, porque no se puede borrar un insumo ya facturado.</a:t>
-            </a:r>
-          </a:p>
-          <a:p>
-            <a:r>
-              <a:t>La conclusion honesta es que en produccion casi nada se borra: se marca inactivo con activa CHAR(1) DEFAULT 'S' CHECK (activa IN ('S','N')).</a:t>
-            </a:r>
-          </a:p>
-          <a:p>
-            <a:r>
-              <a:t>La accion ante el borrado del padre se declara en la propia FK: ON DELETE RESTRICT, o NO ACTION, que es la opcion por omision, impide borrar un dueno con mascotas</a:t>
-            </a:r>
-          </a:p>
-          <a:p>
-            <a:r>
-              <a:t>ON DELETE CASCADE borraria tambien sus mascotas y citas, que en una clinica es perder historia clinica</a:t>
-            </a:r>
-          </a:p>
-          <a:p>
-            <a:r>
-              <a:t>En la clínica la eleccion razonable es RESTRICT mas baja logica.</a:t>
+              <a:t>En un sistema real no se borran clientes ni pacientes: no se hace DELETE FROM mascota.</a:t>
+            </a:r>
+          </a:p>
+          <a:p>
+            <a:r>
+              <a:t>Primero por integridad, porque la fila esta referenciada por citas, consultas y facturas y el motor lo va a impedir; segundo por trazabilidad</a:t>
+            </a:r>
+          </a:p>
+          <a:p>
+            <a:r>
+              <a:t>Porque el historial clinico y la facturacion de esa mascota tienen que seguir existiendo aunque la mascota ya no venga; y tercero porque un borrado es irreversible y una equivocacion de digitacion no deberia serlo.</a:t>
+            </a:r>
+          </a:p>
+          <a:p>
+            <a:r>
+              <a:t>La regla vive en otra capa: un CHECK si solo mira columnas de la misma fila, un procedimiento almacenado si necesita consultar otra tabla (Clase 3), o un disparador si debe aplicarse aunque nadie llame al procedimiento (Clase 4).</a:t>
             </a:r>
           </a:p>
           <a:p>
@@ -1978,37 +1761,22 @@
           </a:p>
           <a:p>
             <a:r>
-              <a:t>Lo que casi nunca se explica es la otra mitad: que pasa al borrar el padre.</a:t>
-            </a:r>
-          </a:p>
-          <a:p>
-            <a:r>
-              <a:t>Al declarar la clave foranea se elige el comportamiento</a:t>
-            </a:r>
-          </a:p>
-          <a:p>
-            <a:r>
-              <a:t>RESTRICT o NO ACTION impide borrar el dueno mientras tenga mascotas, CASCADE borra las filas hijas en cadena y SET NULL deja la referencia nula.</a:t>
-            </a:r>
-          </a:p>
-          <a:p>
-            <a:r>
-              <a:t>Esa baja logica es la que obliga a validar en la Clase 3 que una mascota inactiva no agende, porque la clave foranea la sigue aceptando: el identificador existe, el negocio no lo quiere.</a:t>
-            </a:r>
-          </a:p>
-          <a:p>
-            <a:r>
-              <a:t>ON DELETE SET NULL deja la fila huerfana con la columna en nulo.</a:t>
-            </a:r>
-          </a:p>
-          <a:p>
-            <a:r>
-              <a:t>CÓDIGO CITADO (referencia):</a:t>
-            </a:r>
-          </a:p>
-          <a:p>
-            <a:r>
-              <a:t>INSERT INTO cita (id_cita, id_mascota, fecha_hora, estado) VALUES (101, 999, TIMESTAMP '2026-09-01 09:00:00', 'PROGRAMADA')</a:t>
+              <a:t>Conviene detenerse en la baja logica porque es la decision que sostiene medio semestre y casi nunca se explica.</a:t>
+            </a:r>
+          </a:p>
+          <a:p>
+            <a:r>
+              <a:t>Lo que se hace es marcar la fila como inactiva: activa CHAR(1) DEFAULT 'S' CHECK (activa IN ('S','N')), y las consultas del dia a dia filtran WHERE activa = 'S'.</a:t>
+            </a:r>
+          </a:p>
+          <a:p>
+            <a:r>
+              <a:t>La consecuencia que hay que subrayar, porque es la que abre la Clase 3, es que la clave foranea NO defiende esa regla: para el motor, la mascota inactiva existe y su identificador es valido, asi que aceptara sin chistar una cita nueva sobre ella.</a:t>
+            </a:r>
+          </a:p>
+          <a:p>
+            <a:r>
+              <a:t>Si el estudiante sale hoy con DELETE en la cabeza, en la Clase 3 no va a entender por que hace falta sp_agendar_cita.</a:t>
             </a:r>
           </a:p>
         </p:txBody>
@@ -2083,22 +1851,42 @@
           </a:p>
           <a:p>
             <a:r>
-              <a:t>En un sistema real no se borran clientes ni pacientes: no se hace DELETE FROM mascota.</a:t>
-            </a:r>
-          </a:p>
-          <a:p>
-            <a:r>
-              <a:t>Primero por integridad, porque la fila esta referenciada por citas, consultas y facturas y el motor lo va a impedir; segundo por trazabilidad</a:t>
-            </a:r>
-          </a:p>
-          <a:p>
-            <a:r>
-              <a:t>Porque el historial clinico y la facturacion de esa mascota tienen que seguir existiendo aunque la mascota ya no venga; y tercero porque un borrado es irreversible y una equivocacion de digitacion no deberia serlo.</a:t>
-            </a:r>
-          </a:p>
-          <a:p>
-            <a:r>
-              <a:t>La regla vive en otra capa: un CHECK si solo mira columnas de la misma fila, un procedimiento almacenado si necesita consultar otra tabla (Clase 3), o un disparador si debe aplicarse aunque nadie llame al procedimiento (Clase 4).</a:t>
+              <a:t>Hace falta distinguir un diagrama entidad-relacion de un dibujo, porque es facil hacer lo segundo creyendo que es lo primero.</a:t>
+            </a:r>
+          </a:p>
+          <a:p>
+            <a:r>
+              <a:t>Un dibujo son cajas con nombres unidas por lineas.</a:t>
+            </a:r>
+          </a:p>
+          <a:p>
+            <a:r>
+              <a:t>Un diagrama bien hecho cumple cinco condiciones verificables: entidades en singular con su clave primaria marcada; cada atributo con tipo y longitud, no solo nombre</a:t>
+            </a:r>
+          </a:p>
+          <a:p>
+            <a:r>
+              <a:t>Cada clave foranea senalada indicando a que entidad apunta; cada relacion con cardinalidad en los dos extremos, con maximo y minimo; y cada relacion con nombre verbal legible, Dueno posee Mascota, Veterinario atiende Cita.</a:t>
+            </a:r>
+          </a:p>
+          <a:p>
+            <a:r>
+              <a:t>El criterio de aceptacion que conviene entregar es operativo: el diagrama esta bien si otra persona puede escribir el CREATE TABLE completo mirandolo, sin preguntar nada.</a:t>
+            </a:r>
+          </a:p>
+          <a:p>
+            <a:r>
+              <a:t>La opcionalidad es la parte que siempre se omite y la que mas cuesta despues.</a:t>
+            </a:r>
+          </a:p>
+          <a:p>
+            <a:r>
+              <a:t>En la clínica, Consulta y Cita estan en relacion uno a uno pero no simetrica: una cita programada aun no tiene consulta, y una consulta no existe sin su cita.</a:t>
+            </a:r>
+          </a:p>
+          <a:p>
+            <a:r>
+              <a:t>Como referencia de tamano, el modelo tiene ocho entidades y siete relaciones y debe caber legible en una hoja; si no cabe, se divide en vistas por subsistema, y eso es convencion, no norma.</a:t>
             </a:r>
           </a:p>
           <a:p>
@@ -2108,22 +1896,7 @@
           </a:p>
           <a:p>
             <a:r>
-              <a:t>Conviene detenerse en la baja logica porque es la decision que sostiene medio semestre y casi nunca se explica.</a:t>
-            </a:r>
-          </a:p>
-          <a:p>
-            <a:r>
-              <a:t>Lo que se hace es marcar la fila como inactiva: activa CHAR(1) DEFAULT 'S' CHECK (activa IN ('S','N')), y las consultas del dia a dia filtran WHERE activa = 'S'.</a:t>
-            </a:r>
-          </a:p>
-          <a:p>
-            <a:r>
-              <a:t>La consecuencia que hay que subrayar, porque es la que abre la Clase 3, es que la clave foranea NO defiende esa regla: para el motor, la mascota inactiva existe y su identificador es valido, asi que aceptara sin chistar una cita nueva sobre ella.</a:t>
-            </a:r>
-          </a:p>
-          <a:p>
-            <a:r>
-              <a:t>Si el estudiante sale hoy con DELETE en la cabeza, en la Clase 3 no va a entender por que hace falta sp_agendar_cita.</a:t>
+              <a:t>Eso se materializa como consulta.id_cita NOT NULL UNIQUE, no como una clave foranea simple, y decidirlo hoy evita la pregunta que aparece en la Clase 3 cuando alguien intenta registrar la consulta antes de la cita.</a:t>
             </a:r>
           </a:p>
         </p:txBody>
@@ -2198,52 +1971,37 @@
           </a:p>
           <a:p>
             <a:r>
-              <a:t>Hace falta distinguir un diagrama entidad-relacion de un dibujo, porque es facil hacer lo segundo creyendo que es lo primero.</a:t>
-            </a:r>
-          </a:p>
-          <a:p>
-            <a:r>
-              <a:t>Un dibujo son cajas con nombres unidas por lineas.</a:t>
-            </a:r>
-          </a:p>
-          <a:p>
-            <a:r>
-              <a:t>Un diagrama bien hecho cumple cinco condiciones verificables: entidades en singular con su clave primaria marcada; cada atributo con tipo y longitud, no solo nombre</a:t>
-            </a:r>
-          </a:p>
-          <a:p>
-            <a:r>
-              <a:t>Cada clave foranea senalada indicando a que entidad apunta; cada relacion con cardinalidad en los dos extremos, con maximo y minimo; y cada relacion con nombre verbal legible, Dueno posee Mascota, Veterinario atiende Cita.</a:t>
-            </a:r>
-          </a:p>
-          <a:p>
-            <a:r>
-              <a:t>El criterio de aceptacion que conviene entregar es operativo: el diagrama esta bien si otra persona puede escribir el CREATE TABLE completo mirandolo, sin preguntar nada.</a:t>
-            </a:r>
-          </a:p>
-          <a:p>
-            <a:r>
-              <a:t>La opcionalidad es la parte que siempre se omite y la que mas cuesta despues.</a:t>
-            </a:r>
-          </a:p>
-          <a:p>
-            <a:r>
-              <a:t>En la clínica, Consulta y Cita estan en relacion uno a uno pero no simetrica: una cita programada aun no tiene consulta, y una consulta no existe sin su cita.</a:t>
-            </a:r>
-          </a:p>
-          <a:p>
-            <a:r>
-              <a:t>Como referencia de tamano, el modelo tiene ocho entidades y siete relaciones y debe caber legible en una hoja; si no cabe, se divide en vistas por subsistema, y eso es convencion, no norma.</a:t>
-            </a:r>
-          </a:p>
-          <a:p>
-            <a:r>
-              <a:t>NOTAS:</a:t>
-            </a:r>
-          </a:p>
-          <a:p>
-            <a:r>
-              <a:t>Eso se materializa como consulta.id_cita NOT NULL UNIQUE, no como una clave foranea simple, y decidirlo hoy evita la pregunta que aparece en la Clase 3 cuando alguien intenta registrar la consulta antes de la cita.</a:t>
+              <a:t>Elegir tipos parece trivial y es donde se pagan las facturas mas caras del semestre.</a:t>
+            </a:r>
+          </a:p>
+          <a:p>
+            <a:r>
+              <a:t>Un telefono no es un numero: como NUMBER se pierden los ceros iniciales, no cabe el prefijo internacional ni una extension, asi que va VARCHAR(30).</a:t>
+            </a:r>
+          </a:p>
+          <a:p>
+            <a:r>
+              <a:t>Una fecha no es texto: si fecha_hora fuera VARCHAR(20), el ORDER BY seria alfabetico y no cronologico, no se podrian sumar treinta minutos para calcular el fin de la cita y el indice de la Clase 7 serviria de poco; va TIMESTAMP.</a:t>
+            </a:r>
+          </a:p>
+          <a:p>
+            <a:r>
+              <a:t>El dinero no es flotante: FLOAT representa decimales en binario y arrastra errores que, sumados en cientos de lineas de detalle_factura, hacen que el total no cuadre con sus partes; va NUMBER(12,2) en Oracle o DECIMAL(12,2) en PostgreSQL.</a:t>
+            </a:r>
+          </a:p>
+          <a:p>
+            <a:r>
+              <a:t>La tentacion contraria, declarar todo VARCHAR(4000) por comodidad, renuncia a que la base valide algo y traslada la validacion entera a quien programe cada pantalla.</a:t>
+            </a:r>
+          </a:p>
+          <a:p>
+            <a:r>
+              <a:t>Numeros de referencia como convencion del curso: nombre VARCHAR(80), email VARCHAR(120) porque el estandar de correo admite hasta 254 caracteres, telefono VARCHAR(30), especie VARCHAR(40).</a:t>
+            </a:r>
+          </a:p>
+          <a:p>
+            <a:r>
+              <a:t>El costo de equivocarse no es reescribir una linea: la tabla ya tiene datos, el ALTER TABLE debe convertir cada valor, puede fallar por una sola fila invalida, bloquea la tabla mientras dura, y los procedimientos de las Clases 3 y 4 ya asumen el tipo antiguo.</a:t>
             </a:r>
           </a:p>
         </p:txBody>
@@ -14584,118 +14342,14 @@
       </p:sp>
       <p:sp>
         <p:nvSpPr>
-          <p:cNvPr id="5" name="Rounded Rectangle 4"/>
-          <p:cNvSpPr/>
-          <p:nvPr/>
-        </p:nvSpPr>
-        <p:spPr>
-          <a:xfrm>
-            <a:off x="5797149" y="1573813"/>
-            <a:ext cx="6010497" cy="4057845"/>
-          </a:xfrm>
-          <a:prstGeom prst="roundRect">
-            <a:avLst>
-              <a:gd name="adj" fmla="val 4000"/>
-            </a:avLst>
-          </a:prstGeom>
-          <a:solidFill>
-            <a:srgbClr val="E8EEF4"/>
-          </a:solidFill>
-          <a:ln>
-            <a:noFill/>
-          </a:ln>
-        </p:spPr>
-        <p:style>
-          <a:lnRef idx="1">
-            <a:schemeClr val="accent1"/>
-          </a:lnRef>
-          <a:fillRef idx="3">
-            <a:schemeClr val="accent1"/>
-          </a:fillRef>
-          <a:effectRef idx="2">
-            <a:schemeClr val="accent1"/>
-          </a:effectRef>
-          <a:fontRef idx="minor">
-            <a:schemeClr val="lt1"/>
-          </a:fontRef>
-        </p:style>
-        <p:txBody>
-          <a:bodyPr rtlCol="0" anchor="ctr"/>
-          <a:lstStyle/>
-          <a:p>
-            <a:pPr algn="ctr"/>
-          </a:p>
-        </p:txBody>
-      </p:sp>
-      <p:pic>
-        <p:nvPicPr>
-          <p:cNvPr id="6" name="Picture 5" descr="notebook-planning-desk-coffee.jpg"/>
-          <p:cNvPicPr>
-            <a:picLocks noChangeAspect="1"/>
-          </p:cNvPicPr>
-          <p:nvPr/>
-        </p:nvPicPr>
-        <p:blipFill>
-          <a:blip r:embed="rId2"/>
-          <a:stretch>
-            <a:fillRect/>
-          </a:stretch>
-        </p:blipFill>
-        <p:spPr>
-          <a:xfrm>
-            <a:off x="5870301" y="1646965"/>
-            <a:ext cx="5864193" cy="3911541"/>
-          </a:xfrm>
-          <a:prstGeom prst="rect">
-            <a:avLst/>
-          </a:prstGeom>
-        </p:spPr>
-      </p:pic>
-      <p:sp>
-        <p:nvSpPr>
-          <p:cNvPr id="7" name="TextBox 6"/>
+          <p:cNvPr id="5" name="TextBox 4"/>
           <p:cNvSpPr txBox="1"/>
           <p:nvPr/>
         </p:nvSpPr>
         <p:spPr>
           <a:xfrm>
-            <a:off x="5870301" y="5961888"/>
-            <a:ext cx="5864193" cy="320040"/>
-          </a:xfrm>
-          <a:prstGeom prst="rect">
-            <a:avLst/>
-          </a:prstGeom>
-          <a:noFill/>
-        </p:spPr>
-        <p:txBody>
-          <a:bodyPr wrap="square">
-            <a:spAutoFit/>
-          </a:bodyPr>
-          <a:lstStyle/>
-          <a:p>
-            <a:pPr algn="ctr"/>
-            <a:r>
-              <a:rPr sz="1100" b="0" i="1">
-                <a:solidFill>
-                  <a:srgbClr val="666666"/>
-                </a:solidFill>
-                <a:latin typeface="Calibri"/>
-              </a:rPr>
-              <a:t>Foto: Cup of  Couple · Pexels</a:t>
-            </a:r>
-          </a:p>
-        </p:txBody>
-      </p:sp>
-      <p:sp>
-        <p:nvSpPr>
-          <p:cNvPr id="8" name="TextBox 7"/>
-          <p:cNvSpPr txBox="1"/>
-          <p:nvPr/>
-        </p:nvSpPr>
-        <p:spPr>
-          <a:xfrm>
-            <a:off x="457200" y="1353312"/>
-            <a:ext cx="5093061" cy="5047488"/>
+            <a:off x="457200" y="1170432"/>
+            <a:ext cx="11277295" cy="5230368"/>
           </a:xfrm>
           <a:prstGeom prst="rect">
             <a:avLst/>
@@ -14816,11 +14470,61 @@
               <a:t>–   Recorrido: teoría del tema, una lámina por concepto, y demo del docente sobre la base de la clínica.</a:t>
             </a:r>
           </a:p>
-        </p:txBody>
-      </p:sp>
-      <p:sp>
-        <p:nvSpPr>
-          <p:cNvPr id="9" name="TextBox 8"/>
+          <a:p>
+            <a:pPr>
+              <a:spcAft>
+                <a:spcPts val="800"/>
+              </a:spcAft>
+            </a:pPr>
+            <a:r>
+              <a:rPr sz="2000" b="0" i="0">
+                <a:solidFill>
+                  <a:srgbClr val="333333"/>
+                </a:solidFill>
+                <a:latin typeface="Calibri"/>
+              </a:rPr>
+              <a:t>–   Cada lámina se sostiene sola: sirve para repasar aunque hayas faltado.</a:t>
+            </a:r>
+          </a:p>
+          <a:p>
+            <a:pPr>
+              <a:spcAft>
+                <a:spcPts val="800"/>
+              </a:spcAft>
+            </a:pPr>
+            <a:r>
+              <a:rPr sz="2000" b="0" i="0">
+                <a:solidFill>
+                  <a:srgbClr val="333333"/>
+                </a:solidFill>
+                <a:latin typeface="Calibri"/>
+              </a:rPr>
+              <a:t>–   </a:t>
+            </a:r>
+            <a:r>
+              <a:rPr sz="2000" b="1" i="0">
+                <a:solidFill>
+                  <a:srgbClr val="333333"/>
+                </a:solidFill>
+                <a:latin typeface="Calibri"/>
+              </a:rPr>
+              <a:t>Conceptos de hoy:</a:t>
+            </a:r>
+            <a:r>
+              <a:rPr sz="2000" b="0" i="0">
+                <a:solidFill>
+                  <a:srgbClr val="333333"/>
+                </a:solidFill>
+                <a:latin typeface="Calibri"/>
+              </a:rPr>
+              <a:t> Por que esto no es Bases de Datos I, y el vocabulario minimo · Nivel conceptual y nivel fisico · El patron de tabla · El JOIN de tres tablas.</a:t>
+            </a:r>
+          </a:p>
+        </p:txBody>
+      </p:sp>
+      <p:sp>
+        <p:nvSpPr>
+          <p:cNvPr id="6" name="TextBox 5"/>
           <p:cNvSpPr txBox="1"/>
           <p:nvPr/>
         </p:nvSpPr>
@@ -15541,118 +15245,14 @@
       </p:sp>
       <p:sp>
         <p:nvSpPr>
-          <p:cNvPr id="5" name="Rounded Rectangle 4"/>
-          <p:cNvSpPr/>
-          <p:nvPr/>
-        </p:nvSpPr>
-        <p:spPr>
-          <a:xfrm>
-            <a:off x="5797149" y="1583170"/>
-            <a:ext cx="6010497" cy="4039130"/>
-          </a:xfrm>
-          <a:prstGeom prst="roundRect">
-            <a:avLst>
-              <a:gd name="adj" fmla="val 4000"/>
-            </a:avLst>
-          </a:prstGeom>
-          <a:solidFill>
-            <a:srgbClr val="E8EEF4"/>
-          </a:solidFill>
-          <a:ln>
-            <a:noFill/>
-          </a:ln>
-        </p:spPr>
-        <p:style>
-          <a:lnRef idx="1">
-            <a:schemeClr val="accent1"/>
-          </a:lnRef>
-          <a:fillRef idx="3">
-            <a:schemeClr val="accent1"/>
-          </a:fillRef>
-          <a:effectRef idx="2">
-            <a:schemeClr val="accent1"/>
-          </a:effectRef>
-          <a:fontRef idx="minor">
-            <a:schemeClr val="lt1"/>
-          </a:fontRef>
-        </p:style>
-        <p:txBody>
-          <a:bodyPr rtlCol="0" anchor="ctr"/>
-          <a:lstStyle/>
-          <a:p>
-            <a:pPr algn="ctr"/>
-          </a:p>
-        </p:txBody>
-      </p:sp>
-      <p:pic>
-        <p:nvPicPr>
-          <p:cNvPr id="6" name="Picture 5" descr="laptop-browser-database-code-screen.jpg"/>
-          <p:cNvPicPr>
-            <a:picLocks noChangeAspect="1"/>
-          </p:cNvPicPr>
-          <p:nvPr/>
-        </p:nvPicPr>
-        <p:blipFill>
-          <a:blip r:embed="rId2"/>
-          <a:stretch>
-            <a:fillRect/>
-          </a:stretch>
-        </p:blipFill>
-        <p:spPr>
-          <a:xfrm>
-            <a:off x="5870301" y="1656322"/>
-            <a:ext cx="5864193" cy="3892826"/>
-          </a:xfrm>
-          <a:prstGeom prst="rect">
-            <a:avLst/>
-          </a:prstGeom>
-        </p:spPr>
-      </p:pic>
-      <p:sp>
-        <p:nvSpPr>
-          <p:cNvPr id="7" name="TextBox 6"/>
+          <p:cNvPr id="5" name="TextBox 4"/>
           <p:cNvSpPr txBox="1"/>
           <p:nvPr/>
         </p:nvSpPr>
         <p:spPr>
           <a:xfrm>
-            <a:off x="5870301" y="5961888"/>
-            <a:ext cx="5864193" cy="320040"/>
-          </a:xfrm>
-          <a:prstGeom prst="rect">
-            <a:avLst/>
-          </a:prstGeom>
-          <a:noFill/>
-        </p:spPr>
-        <p:txBody>
-          <a:bodyPr wrap="square">
-            <a:spAutoFit/>
-          </a:bodyPr>
-          <a:lstStyle/>
-          <a:p>
-            <a:pPr algn="ctr"/>
-            <a:r>
-              <a:rPr sz="1100" b="0" i="1">
-                <a:solidFill>
-                  <a:srgbClr val="666666"/>
-                </a:solidFill>
-                <a:latin typeface="Calibri"/>
-              </a:rPr>
-              <a:t>Foto: luis gomes · Pexels</a:t>
-            </a:r>
-          </a:p>
-        </p:txBody>
-      </p:sp>
-      <p:sp>
-        <p:nvSpPr>
-          <p:cNvPr id="8" name="TextBox 7"/>
-          <p:cNvSpPr txBox="1"/>
-          <p:nvPr/>
-        </p:nvSpPr>
-        <p:spPr>
-          <a:xfrm>
-            <a:off x="457200" y="1353312"/>
-            <a:ext cx="5093061" cy="5047488"/>
+            <a:off x="457200" y="1170432"/>
+            <a:ext cx="11277295" cy="5230368"/>
           </a:xfrm>
           <a:prstGeom prst="rect">
             <a:avLst/>
@@ -15677,7 +15277,7 @@
                 </a:solidFill>
                 <a:latin typeface="Calibri"/>
               </a:rPr>
-              <a:t>–   Tambien se demuestra el borrado en cascada: DELETE FROM factura WHERE id_factura = 1 y verificar con SELECT COUNT(*) FROM detalle_factura que las…</a:t>
+              <a:t>–   Tambien se demuestra el borrado en cascada: DELETE FROM factura WHERE id_factura = 1 y verificar con SELECT COUNT(*) FROM detalle_factura que las lineas hijas…</a:t>
             </a:r>
           </a:p>
           <a:p>
@@ -15716,7 +15316,7 @@
       </p:sp>
       <p:sp>
         <p:nvSpPr>
-          <p:cNvPr id="9" name="TextBox 8"/>
+          <p:cNvPr id="6" name="TextBox 5"/>
           <p:cNvSpPr txBox="1"/>
           <p:nvPr/>
         </p:nvSpPr>
@@ -16437,118 +16037,14 @@
       </p:sp>
       <p:sp>
         <p:nvSpPr>
-          <p:cNvPr id="5" name="Rounded Rectangle 4"/>
-          <p:cNvSpPr/>
-          <p:nvPr/>
-        </p:nvSpPr>
-        <p:spPr>
-          <a:xfrm>
-            <a:off x="5797149" y="1573813"/>
-            <a:ext cx="6010497" cy="4057845"/>
-          </a:xfrm>
-          <a:prstGeom prst="roundRect">
-            <a:avLst>
-              <a:gd name="adj" fmla="val 4000"/>
-            </a:avLst>
-          </a:prstGeom>
-          <a:solidFill>
-            <a:srgbClr val="E8EEF4"/>
-          </a:solidFill>
-          <a:ln>
-            <a:noFill/>
-          </a:ln>
-        </p:spPr>
-        <p:style>
-          <a:lnRef idx="1">
-            <a:schemeClr val="accent1"/>
-          </a:lnRef>
-          <a:fillRef idx="3">
-            <a:schemeClr val="accent1"/>
-          </a:fillRef>
-          <a:effectRef idx="2">
-            <a:schemeClr val="accent1"/>
-          </a:effectRef>
-          <a:fontRef idx="minor">
-            <a:schemeClr val="lt1"/>
-          </a:fontRef>
-        </p:style>
-        <p:txBody>
-          <a:bodyPr rtlCol="0" anchor="ctr"/>
-          <a:lstStyle/>
-          <a:p>
-            <a:pPr algn="ctr"/>
-          </a:p>
-        </p:txBody>
-      </p:sp>
-      <p:pic>
-        <p:nvPicPr>
-          <p:cNvPr id="6" name="Picture 5" descr="laptop-code-live-demo.jpg"/>
-          <p:cNvPicPr>
-            <a:picLocks noChangeAspect="1"/>
-          </p:cNvPicPr>
-          <p:nvPr/>
-        </p:nvPicPr>
-        <p:blipFill>
-          <a:blip r:embed="rId2"/>
-          <a:stretch>
-            <a:fillRect/>
-          </a:stretch>
-        </p:blipFill>
-        <p:spPr>
-          <a:xfrm>
-            <a:off x="5870301" y="1646965"/>
-            <a:ext cx="5864193" cy="3911541"/>
-          </a:xfrm>
-          <a:prstGeom prst="rect">
-            <a:avLst/>
-          </a:prstGeom>
-        </p:spPr>
-      </p:pic>
-      <p:sp>
-        <p:nvSpPr>
-          <p:cNvPr id="7" name="TextBox 6"/>
+          <p:cNvPr id="5" name="TextBox 4"/>
           <p:cNvSpPr txBox="1"/>
           <p:nvPr/>
         </p:nvSpPr>
         <p:spPr>
           <a:xfrm>
-            <a:off x="5870301" y="5961888"/>
-            <a:ext cx="5864193" cy="320040"/>
-          </a:xfrm>
-          <a:prstGeom prst="rect">
-            <a:avLst/>
-          </a:prstGeom>
-          <a:noFill/>
-        </p:spPr>
-        <p:txBody>
-          <a:bodyPr wrap="square">
-            <a:spAutoFit/>
-          </a:bodyPr>
-          <a:lstStyle/>
-          <a:p>
-            <a:pPr algn="ctr"/>
-            <a:r>
-              <a:rPr sz="1100" b="0" i="1">
-                <a:solidFill>
-                  <a:srgbClr val="666666"/>
-                </a:solidFill>
-                <a:latin typeface="Calibri"/>
-              </a:rPr>
-              <a:t>Foto: olia danilevich · Pexels</a:t>
-            </a:r>
-          </a:p>
-        </p:txBody>
-      </p:sp>
-      <p:sp>
-        <p:nvSpPr>
-          <p:cNvPr id="8" name="TextBox 7"/>
-          <p:cNvSpPr txBox="1"/>
-          <p:nvPr/>
-        </p:nvSpPr>
-        <p:spPr>
-          <a:xfrm>
-            <a:off x="457200" y="1353312"/>
-            <a:ext cx="5093061" cy="5047488"/>
+            <a:off x="457200" y="1170432"/>
+            <a:ext cx="11277295" cy="5230368"/>
           </a:xfrm>
           <a:prstGeom prst="rect">
             <a:avLst/>
@@ -16618,6 +16114,15 @@
               </a:rPr>
               <a:t>Demo:</a:t>
             </a:r>
+            <a:r>
+              <a:rPr sz="2000" b="0" i="0">
+                <a:solidFill>
+                  <a:srgbClr val="333333"/>
+                </a:solidFill>
+                <a:latin typeface="Calibri"/>
+              </a:rPr>
+              <a:t> Boceto ER en draw.io (Dueno-Mascota-Cita) + CREATE TABLE minimo en DB Fiddle, y cierre pasando el boceto a Mermaid con IA para pegarlo renderizado.</a:t>
+            </a:r>
           </a:p>
           <a:p>
             <a:pPr>
@@ -16666,14 +16171,48 @@
                 </a:solidFill>
                 <a:latin typeface="Calibri"/>
               </a:rPr>
-              <a:t> la FK rechaza una cita para una mascota que no existe:</a:t>
-            </a:r>
-          </a:p>
-        </p:txBody>
-      </p:sp>
-      <p:sp>
-        <p:nvSpPr>
-          <p:cNvPr id="9" name="TextBox 8"/>
+              <a:t> la FK rechaza una cita para una mascota que no existe: el motor responde con violacion de clave foranea y no inserta nada.</a:t>
+            </a:r>
+          </a:p>
+          <a:p>
+            <a:pPr>
+              <a:spcAft>
+                <a:spcPts val="800"/>
+              </a:spcAft>
+            </a:pPr>
+            <a:r>
+              <a:rPr sz="2000" b="0" i="0">
+                <a:solidFill>
+                  <a:srgbClr val="333333"/>
+                </a:solidFill>
+                <a:latin typeface="Calibri"/>
+              </a:rPr>
+              <a:t>–   </a:t>
+            </a:r>
+            <a:r>
+              <a:rPr sz="2000" b="1" i="0">
+                <a:solidFill>
+                  <a:srgbClr val="333333"/>
+                </a:solidFill>
+                <a:latin typeface="Calibri"/>
+              </a:rPr>
+              <a:t>Qué observar:</a:t>
+            </a:r>
+            <a:r>
+              <a:rPr sz="2000" b="0" i="0">
+                <a:solidFill>
+                  <a:srgbClr val="333333"/>
+                </a:solidFill>
+                <a:latin typeface="Calibri"/>
+              </a:rPr>
+              <a:t> el mismo modelo en tres formas que deben coincidir: el boceto, el DDL que compila y el texto erDiagram.</a:t>
+            </a:r>
+          </a:p>
+        </p:txBody>
+      </p:sp>
+      <p:sp>
+        <p:nvSpPr>
+          <p:cNvPr id="6" name="TextBox 5"/>
           <p:cNvSpPr txBox="1"/>
           <p:nvPr/>
         </p:nvSpPr>
@@ -18871,118 +18410,14 @@
       </p:sp>
       <p:sp>
         <p:nvSpPr>
-          <p:cNvPr id="6" name="Rounded Rectangle 5"/>
-          <p:cNvSpPr/>
-          <p:nvPr/>
-        </p:nvSpPr>
-        <p:spPr>
-          <a:xfrm>
-            <a:off x="5797149" y="1678969"/>
-            <a:ext cx="6010497" cy="4057845"/>
-          </a:xfrm>
-          <a:prstGeom prst="roundRect">
-            <a:avLst>
-              <a:gd name="adj" fmla="val 4000"/>
-            </a:avLst>
-          </a:prstGeom>
-          <a:solidFill>
-            <a:srgbClr val="E8EEF4"/>
-          </a:solidFill>
-          <a:ln>
-            <a:noFill/>
-          </a:ln>
-        </p:spPr>
-        <p:style>
-          <a:lnRef idx="1">
-            <a:schemeClr val="accent1"/>
-          </a:lnRef>
-          <a:fillRef idx="3">
-            <a:schemeClr val="accent1"/>
-          </a:fillRef>
-          <a:effectRef idx="2">
-            <a:schemeClr val="accent1"/>
-          </a:effectRef>
-          <a:fontRef idx="minor">
-            <a:schemeClr val="lt1"/>
-          </a:fontRef>
-        </p:style>
-        <p:txBody>
-          <a:bodyPr rtlCol="0" anchor="ctr"/>
-          <a:lstStyle/>
-          <a:p>
-            <a:pPr algn="ctr"/>
-          </a:p>
-        </p:txBody>
-      </p:sp>
-      <p:pic>
-        <p:nvPicPr>
-          <p:cNvPr id="7" name="Picture 6" descr="veterinary-clinic-paper-records.jpg"/>
-          <p:cNvPicPr>
-            <a:picLocks noChangeAspect="1"/>
-          </p:cNvPicPr>
-          <p:nvPr/>
-        </p:nvPicPr>
-        <p:blipFill>
-          <a:blip r:embed="rId2"/>
-          <a:stretch>
-            <a:fillRect/>
-          </a:stretch>
-        </p:blipFill>
-        <p:spPr>
-          <a:xfrm>
-            <a:off x="5870301" y="1752121"/>
-            <a:ext cx="5864193" cy="3911541"/>
-          </a:xfrm>
-          <a:prstGeom prst="rect">
-            <a:avLst/>
-          </a:prstGeom>
-        </p:spPr>
-      </p:pic>
-      <p:sp>
-        <p:nvSpPr>
-          <p:cNvPr id="8" name="TextBox 7"/>
+          <p:cNvPr id="6" name="TextBox 5"/>
           <p:cNvSpPr txBox="1"/>
           <p:nvPr/>
         </p:nvSpPr>
         <p:spPr>
           <a:xfrm>
-            <a:off x="5870301" y="5961888"/>
-            <a:ext cx="5864193" cy="320040"/>
-          </a:xfrm>
-          <a:prstGeom prst="rect">
-            <a:avLst/>
-          </a:prstGeom>
-          <a:noFill/>
-        </p:spPr>
-        <p:txBody>
-          <a:bodyPr wrap="square">
-            <a:spAutoFit/>
-          </a:bodyPr>
-          <a:lstStyle/>
-          <a:p>
-            <a:pPr algn="ctr"/>
-            <a:r>
-              <a:rPr sz="1100" b="0" i="1">
-                <a:solidFill>
-                  <a:srgbClr val="666666"/>
-                </a:solidFill>
-                <a:latin typeface="Calibri"/>
-              </a:rPr>
-              <a:t>Foto: SHVETS production · Pexels</a:t>
-            </a:r>
-          </a:p>
-        </p:txBody>
-      </p:sp>
-      <p:sp>
-        <p:nvSpPr>
-          <p:cNvPr id="9" name="TextBox 8"/>
-          <p:cNvSpPr txBox="1"/>
-          <p:nvPr/>
-        </p:nvSpPr>
-        <p:spPr>
-          <a:xfrm>
-            <a:off x="457200" y="1563624"/>
-            <a:ext cx="5093061" cy="4837176"/>
+            <a:off x="457200" y="1380744"/>
+            <a:ext cx="11277295" cy="5020056"/>
           </a:xfrm>
           <a:prstGeom prst="rect">
             <a:avLst/>
@@ -19025,7 +18460,61 @@
                 </a:solidFill>
                 <a:latin typeface="Calibri"/>
               </a:rPr>
-              <a:t> (Cali):</a:t>
+              <a:t> (Cali): unas </a:t>
+            </a:r>
+            <a:r>
+              <a:rPr sz="2000" b="1" i="0">
+                <a:solidFill>
+                  <a:srgbClr val="333333"/>
+                </a:solidFill>
+                <a:latin typeface="Calibri"/>
+              </a:rPr>
+              <a:t>150 citas al día</a:t>
+            </a:r>
+            <a:r>
+              <a:rPr sz="2000" b="0" i="0">
+                <a:solidFill>
+                  <a:srgbClr val="333333"/>
+                </a:solidFill>
+                <a:latin typeface="Calibri"/>
+              </a:rPr>
+              <a:t>, </a:t>
+            </a:r>
+            <a:r>
+              <a:rPr sz="2000" b="1" i="0">
+                <a:solidFill>
+                  <a:srgbClr val="333333"/>
+                </a:solidFill>
+                <a:latin typeface="Calibri"/>
+              </a:rPr>
+              <a:t>16 veterinarios</a:t>
+            </a:r>
+            <a:r>
+              <a:rPr sz="2000" b="0" i="0">
+                <a:solidFill>
+                  <a:srgbClr val="333333"/>
+                </a:solidFill>
+                <a:latin typeface="Calibri"/>
+              </a:rPr>
+              <a:t>, ~5.000 mascotas de ~2.000 dueños — y todo en </a:t>
+            </a:r>
+            <a:r>
+              <a:rPr sz="2000" b="1" i="0">
+                <a:solidFill>
+                  <a:srgbClr val="333333"/>
+                </a:solidFill>
+                <a:latin typeface="Calibri"/>
+              </a:rPr>
+              <a:t>carpetas de papel</a:t>
+            </a:r>
+            <a:r>
+              <a:rPr sz="2000" b="0" i="0">
+                <a:solidFill>
+                  <a:srgbClr val="333333"/>
+                </a:solidFill>
+                <a:latin typeface="Calibri"/>
+              </a:rPr>
+              <a:t>.</a:t>
             </a:r>
           </a:p>
           <a:p>
@@ -19111,7 +18600,7 @@
                 </a:solidFill>
                 <a:latin typeface="Calibri"/>
               </a:rPr>
-              <a:t> el…</a:t>
+              <a:t> el historial a la mano.</a:t>
             </a:r>
           </a:p>
           <a:p>
@@ -19145,14 +18634,66 @@
                 </a:solidFill>
                 <a:latin typeface="Calibri"/>
               </a:rPr>
-              <a:t>: más datos dan mejores métricas, pero hacen más lento el agendamiento.</a:t>
-            </a:r>
-          </a:p>
-        </p:txBody>
-      </p:sp>
-      <p:sp>
-        <p:nvSpPr>
-          <p:cNvPr id="10" name="TextBox 9"/>
+              <a:t>: más datos dan mejores métricas, pero hacen más lento el agendamiento. Ahí están las decisiones de diseño del semestre.</a:t>
+            </a:r>
+          </a:p>
+          <a:p>
+            <a:pPr>
+              <a:spcAft>
+                <a:spcPts val="800"/>
+              </a:spcAft>
+            </a:pPr>
+            <a:r>
+              <a:rPr sz="2000" b="0" i="0">
+                <a:solidFill>
+                  <a:srgbClr val="333333"/>
+                </a:solidFill>
+                <a:latin typeface="Calibri"/>
+              </a:rPr>
+              <a:t>–   El modelo de la clínica tiene </a:t>
+            </a:r>
+            <a:r>
+              <a:rPr sz="2000" b="1" i="0">
+                <a:solidFill>
+                  <a:srgbClr val="333333"/>
+                </a:solidFill>
+                <a:latin typeface="Calibri"/>
+              </a:rPr>
+              <a:t>8 entidades</a:t>
+            </a:r>
+            <a:r>
+              <a:rPr sz="2000" b="0" i="0">
+                <a:solidFill>
+                  <a:srgbClr val="333333"/>
+                </a:solidFill>
+                <a:latin typeface="Calibri"/>
+              </a:rPr>
+              <a:t> y </a:t>
+            </a:r>
+            <a:r>
+              <a:rPr sz="2000" b="1" i="0">
+                <a:solidFill>
+                  <a:srgbClr val="333333"/>
+                </a:solidFill>
+                <a:latin typeface="Calibri"/>
+              </a:rPr>
+              <a:t>3 reglas de negocio</a:t>
+            </a:r>
+            <a:r>
+              <a:rPr sz="2000" b="0" i="0">
+                <a:solidFill>
+                  <a:srgbClr val="333333"/>
+                </a:solidFill>
+                <a:latin typeface="Calibri"/>
+              </a:rPr>
+              <a:t>: dueño, mascota, veterinario, cita, consulta, insumo, factura y detalle de factura.</a:t>
+            </a:r>
+          </a:p>
+        </p:txBody>
+      </p:sp>
+      <p:sp>
+        <p:nvSpPr>
+          <p:cNvPr id="7" name="TextBox 6"/>
           <p:cNvSpPr txBox="1"/>
           <p:nvPr/>
         </p:nvSpPr>

--- a/Bases de Datos II/Clases/Clase 1 - Revision BD I y modelo de datos/Presentacion.pptx
+++ b/Bases de Datos II/Clases/Clase 1 - Revision BD I y modelo de datos/Presentacion.pptx
@@ -12019,7 +12019,7 @@
         <p:spPr>
           <a:xfrm>
             <a:off x="457200" y="1261872"/>
-            <a:ext cx="11277295" cy="4220725"/>
+            <a:ext cx="11277295" cy="4065696"/>
           </a:xfrm>
           <a:prstGeom prst="roundRect">
             <a:avLst>
@@ -12269,7 +12269,7 @@
         <p:spPr>
           <a:xfrm>
             <a:off x="685800" y="1719072"/>
-            <a:ext cx="502920" cy="3626365"/>
+            <a:ext cx="502920" cy="3471336"/>
           </a:xfrm>
           <a:prstGeom prst="rect">
             <a:avLst/>
@@ -12284,11 +12284,11 @@
           <a:p>
             <a:pPr algn="r">
               <a:spcAft>
-                <a:spcPts val="428"/>
+                <a:spcPts val="407"/>
               </a:spcAft>
             </a:pPr>
             <a:r>
-              <a:rPr sz="2000" i="0" b="0">
+              <a:rPr sz="1900" i="0" b="0">
                 <a:solidFill>
                   <a:srgbClr val="858585"/>
                 </a:solidFill>
@@ -12300,11 +12300,11 @@
           <a:p>
             <a:pPr algn="r">
               <a:spcAft>
-                <a:spcPts val="428"/>
+                <a:spcPts val="407"/>
               </a:spcAft>
             </a:pPr>
             <a:r>
-              <a:rPr sz="2000" i="0" b="0">
+              <a:rPr sz="1900" i="0" b="0">
                 <a:solidFill>
                   <a:srgbClr val="858585"/>
                 </a:solidFill>
@@ -12316,11 +12316,11 @@
           <a:p>
             <a:pPr algn="r">
               <a:spcAft>
-                <a:spcPts val="428"/>
+                <a:spcPts val="407"/>
               </a:spcAft>
             </a:pPr>
             <a:r>
-              <a:rPr sz="2000" i="0" b="0">
+              <a:rPr sz="1900" i="0" b="0">
                 <a:solidFill>
                   <a:srgbClr val="858585"/>
                 </a:solidFill>
@@ -12332,11 +12332,11 @@
           <a:p>
             <a:pPr algn="r">
               <a:spcAft>
-                <a:spcPts val="428"/>
+                <a:spcPts val="407"/>
               </a:spcAft>
             </a:pPr>
             <a:r>
-              <a:rPr sz="2000" i="0" b="0">
+              <a:rPr sz="1900" i="0" b="0">
                 <a:solidFill>
                   <a:srgbClr val="858585"/>
                 </a:solidFill>
@@ -12348,11 +12348,11 @@
           <a:p>
             <a:pPr algn="r">
               <a:spcAft>
-                <a:spcPts val="428"/>
+                <a:spcPts val="407"/>
               </a:spcAft>
             </a:pPr>
             <a:r>
-              <a:rPr sz="2000" i="0" b="0">
+              <a:rPr sz="1900" i="0" b="0">
                 <a:solidFill>
                   <a:srgbClr val="858585"/>
                 </a:solidFill>
@@ -12364,11 +12364,11 @@
           <a:p>
             <a:pPr algn="r">
               <a:spcAft>
-                <a:spcPts val="428"/>
+                <a:spcPts val="407"/>
               </a:spcAft>
             </a:pPr>
             <a:r>
-              <a:rPr sz="2000" i="0" b="0">
+              <a:rPr sz="1900" i="0" b="0">
                 <a:solidFill>
                   <a:srgbClr val="858585"/>
                 </a:solidFill>
@@ -12380,11 +12380,11 @@
           <a:p>
             <a:pPr algn="r">
               <a:spcAft>
-                <a:spcPts val="428"/>
+                <a:spcPts val="407"/>
               </a:spcAft>
             </a:pPr>
             <a:r>
-              <a:rPr sz="2000" i="0" b="0">
+              <a:rPr sz="1900" i="0" b="0">
                 <a:solidFill>
                   <a:srgbClr val="858585"/>
                 </a:solidFill>
@@ -12396,11 +12396,11 @@
           <a:p>
             <a:pPr algn="r">
               <a:spcAft>
-                <a:spcPts val="428"/>
+                <a:spcPts val="407"/>
               </a:spcAft>
             </a:pPr>
             <a:r>
-              <a:rPr sz="2000" i="0" b="0">
+              <a:rPr sz="1900" i="0" b="0">
                 <a:solidFill>
                   <a:srgbClr val="858585"/>
                 </a:solidFill>
@@ -12412,11 +12412,11 @@
           <a:p>
             <a:pPr algn="r">
               <a:spcAft>
-                <a:spcPts val="428"/>
+                <a:spcPts val="407"/>
               </a:spcAft>
             </a:pPr>
             <a:r>
-              <a:rPr sz="2000" i="0" b="0">
+              <a:rPr sz="1900" i="0" b="0">
                 <a:solidFill>
                   <a:srgbClr val="858585"/>
                 </a:solidFill>
@@ -12428,11 +12428,11 @@
           <a:p>
             <a:pPr algn="r">
               <a:spcAft>
-                <a:spcPts val="428"/>
+                <a:spcPts val="407"/>
               </a:spcAft>
             </a:pPr>
             <a:r>
-              <a:rPr sz="2000" i="0" b="0">
+              <a:rPr sz="1900" i="0" b="0">
                 <a:solidFill>
                   <a:srgbClr val="858585"/>
                 </a:solidFill>
@@ -12452,7 +12452,7 @@
         <p:spPr>
           <a:xfrm>
             <a:off x="1188720" y="1719072"/>
-            <a:ext cx="10271455" cy="3626365"/>
+            <a:ext cx="10271455" cy="3471336"/>
           </a:xfrm>
           <a:prstGeom prst="rect">
             <a:avLst/>
@@ -12467,11 +12467,11 @@
           <a:p>
             <a:pPr>
               <a:spcAft>
-                <a:spcPts val="428"/>
+                <a:spcPts val="407"/>
               </a:spcAft>
             </a:pPr>
             <a:r>
-              <a:rPr sz="2000" i="1" b="0">
+              <a:rPr sz="1900" i="1" b="0">
                 <a:solidFill>
                   <a:srgbClr val="6A9955"/>
                 </a:solidFill>
@@ -12483,11 +12483,11 @@
           <a:p>
             <a:pPr>
               <a:spcAft>
-                <a:spcPts val="428"/>
+                <a:spcPts val="407"/>
               </a:spcAft>
             </a:pPr>
             <a:r>
-              <a:rPr sz="2000" i="0" b="0">
+              <a:rPr sz="1900" i="0" b="0">
                 <a:solidFill>
                   <a:srgbClr val="569CD6"/>
                 </a:solidFill>
@@ -12496,7 +12496,7 @@
               <a:t>INSERT</a:t>
             </a:r>
             <a:r>
-              <a:rPr sz="2000" i="0" b="0">
+              <a:rPr sz="1900" i="0" b="0">
                 <a:solidFill>
                   <a:srgbClr val="D4D4D4"/>
                 </a:solidFill>
@@ -12505,7 +12505,7 @@
               <a:t> </a:t>
             </a:r>
             <a:r>
-              <a:rPr sz="2000" i="0" b="0">
+              <a:rPr sz="1900" i="0" b="0">
                 <a:solidFill>
                   <a:srgbClr val="569CD6"/>
                 </a:solidFill>
@@ -12514,7 +12514,7 @@
               <a:t>INTO</a:t>
             </a:r>
             <a:r>
-              <a:rPr sz="2000" i="0" b="0">
+              <a:rPr sz="1900" i="0" b="0">
                 <a:solidFill>
                   <a:srgbClr val="D4D4D4"/>
                 </a:solidFill>
@@ -12523,7 +12523,7 @@
               <a:t> </a:t>
             </a:r>
             <a:r>
-              <a:rPr sz="2000" i="0" b="0">
+              <a:rPr sz="1900" i="0" b="0">
                 <a:solidFill>
                   <a:srgbClr val="DCDCAA"/>
                 </a:solidFill>
@@ -12532,7 +12532,7 @@
               <a:t>cita</a:t>
             </a:r>
             <a:r>
-              <a:rPr sz="2000" i="0" b="0">
+              <a:rPr sz="1900" i="0" b="0">
                 <a:solidFill>
                   <a:srgbClr val="D4D4D4"/>
                 </a:solidFill>
@@ -12541,7 +12541,7 @@
               <a:t> (</a:t>
             </a:r>
             <a:r>
-              <a:rPr sz="2000" i="0" b="0">
+              <a:rPr sz="1900" i="0" b="0">
                 <a:solidFill>
                   <a:srgbClr val="D4D4D4"/>
                 </a:solidFill>
@@ -12550,7 +12550,7 @@
               <a:t>id_mascota</a:t>
             </a:r>
             <a:r>
-              <a:rPr sz="2000" i="0" b="0">
+              <a:rPr sz="1900" i="0" b="0">
                 <a:solidFill>
                   <a:srgbClr val="D4D4D4"/>
                 </a:solidFill>
@@ -12559,7 +12559,7 @@
               <a:t>, </a:t>
             </a:r>
             <a:r>
-              <a:rPr sz="2000" i="0" b="0">
+              <a:rPr sz="1900" i="0" b="0">
                 <a:solidFill>
                   <a:srgbClr val="D4D4D4"/>
                 </a:solidFill>
@@ -12568,7 +12568,7 @@
               <a:t>id_veterinario</a:t>
             </a:r>
             <a:r>
-              <a:rPr sz="2000" i="0" b="0">
+              <a:rPr sz="1900" i="0" b="0">
                 <a:solidFill>
                   <a:srgbClr val="D4D4D4"/>
                 </a:solidFill>
@@ -12577,7 +12577,7 @@
               <a:t>, </a:t>
             </a:r>
             <a:r>
-              <a:rPr sz="2000" i="0" b="0">
+              <a:rPr sz="1900" i="0" b="0">
                 <a:solidFill>
                   <a:srgbClr val="D4D4D4"/>
                 </a:solidFill>
@@ -12586,7 +12586,7 @@
               <a:t>fecha_hora</a:t>
             </a:r>
             <a:r>
-              <a:rPr sz="2000" i="0" b="0">
+              <a:rPr sz="1900" i="0" b="0">
                 <a:solidFill>
                   <a:srgbClr val="D4D4D4"/>
                 </a:solidFill>
@@ -12595,7 +12595,7 @@
               <a:t>, </a:t>
             </a:r>
             <a:r>
-              <a:rPr sz="2000" i="0" b="0">
+              <a:rPr sz="1900" i="0" b="0">
                 <a:solidFill>
                   <a:srgbClr val="D4D4D4"/>
                 </a:solidFill>
@@ -12604,7 +12604,7 @@
               <a:t>estado</a:t>
             </a:r>
             <a:r>
-              <a:rPr sz="2000" i="0" b="0">
+              <a:rPr sz="1900" i="0" b="0">
                 <a:solidFill>
                   <a:srgbClr val="D4D4D4"/>
                 </a:solidFill>
@@ -12616,11 +12616,11 @@
           <a:p>
             <a:pPr>
               <a:spcAft>
-                <a:spcPts val="428"/>
+                <a:spcPts val="407"/>
               </a:spcAft>
             </a:pPr>
             <a:r>
-              <a:rPr sz="2000" i="0" b="0">
+              <a:rPr sz="1900" i="0" b="0">
                 <a:solidFill>
                   <a:srgbClr val="569CD6"/>
                 </a:solidFill>
@@ -12629,7 +12629,7 @@
               <a:t>VALUES</a:t>
             </a:r>
             <a:r>
-              <a:rPr sz="2000" i="0" b="0">
+              <a:rPr sz="1900" i="0" b="0">
                 <a:solidFill>
                   <a:srgbClr val="D4D4D4"/>
                 </a:solidFill>
@@ -12638,7 +12638,7 @@
               <a:t> (</a:t>
             </a:r>
             <a:r>
-              <a:rPr sz="2000" i="0" b="0">
+              <a:rPr sz="1900" i="0" b="0">
                 <a:solidFill>
                   <a:srgbClr val="B5CEA8"/>
                 </a:solidFill>
@@ -12647,7 +12647,7 @@
               <a:t>1</a:t>
             </a:r>
             <a:r>
-              <a:rPr sz="2000" i="0" b="0">
+              <a:rPr sz="1900" i="0" b="0">
                 <a:solidFill>
                   <a:srgbClr val="D4D4D4"/>
                 </a:solidFill>
@@ -12656,7 +12656,7 @@
               <a:t>, </a:t>
             </a:r>
             <a:r>
-              <a:rPr sz="2000" i="0" b="0">
+              <a:rPr sz="1900" i="0" b="0">
                 <a:solidFill>
                   <a:srgbClr val="B5CEA8"/>
                 </a:solidFill>
@@ -12665,7 +12665,7 @@
               <a:t>1</a:t>
             </a:r>
             <a:r>
-              <a:rPr sz="2000" i="0" b="0">
+              <a:rPr sz="1900" i="0" b="0">
                 <a:solidFill>
                   <a:srgbClr val="D4D4D4"/>
                 </a:solidFill>
@@ -12674,7 +12674,7 @@
               <a:t>, </a:t>
             </a:r>
             <a:r>
-              <a:rPr sz="2000" i="0" b="0">
+              <a:rPr sz="1900" i="0" b="0">
                 <a:solidFill>
                   <a:srgbClr val="4EC9B0"/>
                 </a:solidFill>
@@ -12683,7 +12683,7 @@
               <a:t>TIMESTAMP</a:t>
             </a:r>
             <a:r>
-              <a:rPr sz="2000" i="0" b="0">
+              <a:rPr sz="1900" i="0" b="0">
                 <a:solidFill>
                   <a:srgbClr val="D4D4D4"/>
                 </a:solidFill>
@@ -12692,7 +12692,7 @@
               <a:t> </a:t>
             </a:r>
             <a:r>
-              <a:rPr sz="2000" i="0" b="0">
+              <a:rPr sz="1900" i="0" b="0">
                 <a:solidFill>
                   <a:srgbClr val="CE9178"/>
                 </a:solidFill>
@@ -12701,7 +12701,7 @@
               <a:t>'2026-09-01 09:00:00'</a:t>
             </a:r>
             <a:r>
-              <a:rPr sz="2000" i="0" b="0">
+              <a:rPr sz="1900" i="0" b="0">
                 <a:solidFill>
                   <a:srgbClr val="D4D4D4"/>
                 </a:solidFill>
@@ -12710,7 +12710,7 @@
               <a:t>, </a:t>
             </a:r>
             <a:r>
-              <a:rPr sz="2000" i="0" b="0">
+              <a:rPr sz="1900" i="0" b="0">
                 <a:solidFill>
                   <a:srgbClr val="CE9178"/>
                 </a:solidFill>
@@ -12719,7 +12719,7 @@
               <a:t>'PROGRAMADA'</a:t>
             </a:r>
             <a:r>
-              <a:rPr sz="2000" i="0" b="0">
+              <a:rPr sz="1900" i="0" b="0">
                 <a:solidFill>
                   <a:srgbClr val="D4D4D4"/>
                 </a:solidFill>
@@ -12731,11 +12731,11 @@
           <a:p>
             <a:pPr>
               <a:spcAft>
-                <a:spcPts val="428"/>
+                <a:spcPts val="407"/>
               </a:spcAft>
             </a:pPr>
             <a:r>
-              <a:rPr sz="2000" i="1" b="0">
+              <a:rPr sz="1900" i="1" b="0">
                 <a:solidFill>
                   <a:srgbClr val="6A9955"/>
                 </a:solidFill>
@@ -12747,11 +12747,11 @@
           <a:p>
             <a:pPr>
               <a:spcAft>
-                <a:spcPts val="428"/>
+                <a:spcPts val="407"/>
               </a:spcAft>
             </a:pPr>
             <a:r>
-              <a:rPr sz="2000" i="0" b="0">
+              <a:rPr sz="1900" i="0" b="0">
                 <a:solidFill>
                   <a:srgbClr val="D4D4D4"/>
                 </a:solidFill>
@@ -12763,11 +12763,11 @@
           <a:p>
             <a:pPr>
               <a:spcAft>
-                <a:spcPts val="428"/>
+                <a:spcPts val="407"/>
               </a:spcAft>
             </a:pPr>
             <a:r>
-              <a:rPr sz="2000" i="0" b="0">
+              <a:rPr sz="1900" i="0" b="0">
                 <a:solidFill>
                   <a:srgbClr val="569CD6"/>
                 </a:solidFill>
@@ -12776,7 +12776,7 @@
               <a:t>INSERT</a:t>
             </a:r>
             <a:r>
-              <a:rPr sz="2000" i="0" b="0">
+              <a:rPr sz="1900" i="0" b="0">
                 <a:solidFill>
                   <a:srgbClr val="D4D4D4"/>
                 </a:solidFill>
@@ -12785,7 +12785,7 @@
               <a:t> </a:t>
             </a:r>
             <a:r>
-              <a:rPr sz="2000" i="0" b="0">
+              <a:rPr sz="1900" i="0" b="0">
                 <a:solidFill>
                   <a:srgbClr val="569CD6"/>
                 </a:solidFill>
@@ -12794,7 +12794,7 @@
               <a:t>INTO</a:t>
             </a:r>
             <a:r>
-              <a:rPr sz="2000" i="0" b="0">
+              <a:rPr sz="1900" i="0" b="0">
                 <a:solidFill>
                   <a:srgbClr val="D4D4D4"/>
                 </a:solidFill>
@@ -12803,7 +12803,7 @@
               <a:t> </a:t>
             </a:r>
             <a:r>
-              <a:rPr sz="2000" i="0" b="0">
+              <a:rPr sz="1900" i="0" b="0">
                 <a:solidFill>
                   <a:srgbClr val="DCDCAA"/>
                 </a:solidFill>
@@ -12812,7 +12812,7 @@
               <a:t>cita</a:t>
             </a:r>
             <a:r>
-              <a:rPr sz="2000" i="0" b="0">
+              <a:rPr sz="1900" i="0" b="0">
                 <a:solidFill>
                   <a:srgbClr val="D4D4D4"/>
                 </a:solidFill>
@@ -12821,7 +12821,7 @@
               <a:t> (</a:t>
             </a:r>
             <a:r>
-              <a:rPr sz="2000" i="0" b="0">
+              <a:rPr sz="1900" i="0" b="0">
                 <a:solidFill>
                   <a:srgbClr val="D4D4D4"/>
                 </a:solidFill>
@@ -12830,7 +12830,7 @@
               <a:t>id_mascota</a:t>
             </a:r>
             <a:r>
-              <a:rPr sz="2000" i="0" b="0">
+              <a:rPr sz="1900" i="0" b="0">
                 <a:solidFill>
                   <a:srgbClr val="D4D4D4"/>
                 </a:solidFill>
@@ -12839,7 +12839,7 @@
               <a:t>, </a:t>
             </a:r>
             <a:r>
-              <a:rPr sz="2000" i="0" b="0">
+              <a:rPr sz="1900" i="0" b="0">
                 <a:solidFill>
                   <a:srgbClr val="D4D4D4"/>
                 </a:solidFill>
@@ -12848,7 +12848,7 @@
               <a:t>id_veterinario</a:t>
             </a:r>
             <a:r>
-              <a:rPr sz="2000" i="0" b="0">
+              <a:rPr sz="1900" i="0" b="0">
                 <a:solidFill>
                   <a:srgbClr val="D4D4D4"/>
                 </a:solidFill>
@@ -12857,7 +12857,7 @@
               <a:t>, </a:t>
             </a:r>
             <a:r>
-              <a:rPr sz="2000" i="0" b="0">
+              <a:rPr sz="1900" i="0" b="0">
                 <a:solidFill>
                   <a:srgbClr val="D4D4D4"/>
                 </a:solidFill>
@@ -12866,7 +12866,7 @@
               <a:t>fecha_hora</a:t>
             </a:r>
             <a:r>
-              <a:rPr sz="2000" i="0" b="0">
+              <a:rPr sz="1900" i="0" b="0">
                 <a:solidFill>
                   <a:srgbClr val="D4D4D4"/>
                 </a:solidFill>
@@ -12875,7 +12875,7 @@
               <a:t>, </a:t>
             </a:r>
             <a:r>
-              <a:rPr sz="2000" i="0" b="0">
+              <a:rPr sz="1900" i="0" b="0">
                 <a:solidFill>
                   <a:srgbClr val="D4D4D4"/>
                 </a:solidFill>
@@ -12884,7 +12884,7 @@
               <a:t>estado</a:t>
             </a:r>
             <a:r>
-              <a:rPr sz="2000" i="0" b="0">
+              <a:rPr sz="1900" i="0" b="0">
                 <a:solidFill>
                   <a:srgbClr val="D4D4D4"/>
                 </a:solidFill>
@@ -12896,11 +12896,11 @@
           <a:p>
             <a:pPr>
               <a:spcAft>
-                <a:spcPts val="428"/>
+                <a:spcPts val="407"/>
               </a:spcAft>
             </a:pPr>
             <a:r>
-              <a:rPr sz="2000" i="0" b="0">
+              <a:rPr sz="1900" i="0" b="0">
                 <a:solidFill>
                   <a:srgbClr val="569CD6"/>
                 </a:solidFill>
@@ -12909,7 +12909,7 @@
               <a:t>VALUES</a:t>
             </a:r>
             <a:r>
-              <a:rPr sz="2000" i="0" b="0">
+              <a:rPr sz="1900" i="0" b="0">
                 <a:solidFill>
                   <a:srgbClr val="D4D4D4"/>
                 </a:solidFill>
@@ -12918,7 +12918,7 @@
               <a:t> (</a:t>
             </a:r>
             <a:r>
-              <a:rPr sz="2000" i="0" b="0">
+              <a:rPr sz="1900" i="0" b="0">
                 <a:solidFill>
                   <a:srgbClr val="B5CEA8"/>
                 </a:solidFill>
@@ -12927,7 +12927,7 @@
               <a:t>999</a:t>
             </a:r>
             <a:r>
-              <a:rPr sz="2000" i="0" b="0">
+              <a:rPr sz="1900" i="0" b="0">
                 <a:solidFill>
                   <a:srgbClr val="D4D4D4"/>
                 </a:solidFill>
@@ -12936,7 +12936,7 @@
               <a:t>, </a:t>
             </a:r>
             <a:r>
-              <a:rPr sz="2000" i="0" b="0">
+              <a:rPr sz="1900" i="0" b="0">
                 <a:solidFill>
                   <a:srgbClr val="B5CEA8"/>
                 </a:solidFill>
@@ -12945,7 +12945,7 @@
               <a:t>1</a:t>
             </a:r>
             <a:r>
-              <a:rPr sz="2000" i="0" b="0">
+              <a:rPr sz="1900" i="0" b="0">
                 <a:solidFill>
                   <a:srgbClr val="D4D4D4"/>
                 </a:solidFill>
@@ -12954,7 +12954,7 @@
               <a:t>, </a:t>
             </a:r>
             <a:r>
-              <a:rPr sz="2000" i="0" b="0">
+              <a:rPr sz="1900" i="0" b="0">
                 <a:solidFill>
                   <a:srgbClr val="4EC9B0"/>
                 </a:solidFill>
@@ -12963,7 +12963,7 @@
               <a:t>TIMESTAMP</a:t>
             </a:r>
             <a:r>
-              <a:rPr sz="2000" i="0" b="0">
+              <a:rPr sz="1900" i="0" b="0">
                 <a:solidFill>
                   <a:srgbClr val="D4D4D4"/>
                 </a:solidFill>
@@ -12972,7 +12972,7 @@
               <a:t> </a:t>
             </a:r>
             <a:r>
-              <a:rPr sz="2000" i="0" b="0">
+              <a:rPr sz="1900" i="0" b="0">
                 <a:solidFill>
                   <a:srgbClr val="CE9178"/>
                 </a:solidFill>
@@ -12981,7 +12981,7 @@
               <a:t>'2026-09-01 10:00:00'</a:t>
             </a:r>
             <a:r>
-              <a:rPr sz="2000" i="0" b="0">
+              <a:rPr sz="1900" i="0" b="0">
                 <a:solidFill>
                   <a:srgbClr val="D4D4D4"/>
                 </a:solidFill>
@@ -12990,7 +12990,7 @@
               <a:t>, </a:t>
             </a:r>
             <a:r>
-              <a:rPr sz="2000" i="0" b="0">
+              <a:rPr sz="1900" i="0" b="0">
                 <a:solidFill>
                   <a:srgbClr val="CE9178"/>
                 </a:solidFill>
@@ -12999,7 +12999,7 @@
               <a:t>'PROGRAMADA'</a:t>
             </a:r>
             <a:r>
-              <a:rPr sz="2000" i="0" b="0">
+              <a:rPr sz="1900" i="0" b="0">
                 <a:solidFill>
                   <a:srgbClr val="D4D4D4"/>
                 </a:solidFill>
@@ -13011,11 +13011,11 @@
           <a:p>
             <a:pPr>
               <a:spcAft>
-                <a:spcPts val="428"/>
+                <a:spcPts val="407"/>
               </a:spcAft>
             </a:pPr>
             <a:r>
-              <a:rPr sz="2000" i="1" b="0">
+              <a:rPr sz="1900" i="1" b="0">
                 <a:solidFill>
                   <a:srgbClr val="6A9955"/>
                 </a:solidFill>
@@ -13027,11 +13027,11 @@
           <a:p>
             <a:pPr>
               <a:spcAft>
-                <a:spcPts val="428"/>
+                <a:spcPts val="407"/>
               </a:spcAft>
             </a:pPr>
             <a:r>
-              <a:rPr sz="2000" i="1" b="0">
+              <a:rPr sz="1900" i="1" b="0">
                 <a:solidFill>
                   <a:srgbClr val="6A9955"/>
                 </a:solidFill>
@@ -13043,11 +13043,11 @@
           <a:p>
             <a:pPr>
               <a:spcAft>
-                <a:spcPts val="428"/>
+                <a:spcPts val="407"/>
               </a:spcAft>
             </a:pPr>
             <a:r>
-              <a:rPr sz="2000" i="1" b="0">
+              <a:rPr sz="1900" i="1" b="0">
                 <a:solidFill>
                   <a:srgbClr val="6A9955"/>
                 </a:solidFill>
@@ -13858,7 +13858,7 @@
         <p:spPr>
           <a:xfrm>
             <a:off x="457200" y="1261872"/>
-            <a:ext cx="11277295" cy="4840843"/>
+            <a:ext cx="11277295" cy="3755638"/>
           </a:xfrm>
           <a:prstGeom prst="roundRect">
             <a:avLst>
@@ -14107,8 +14107,8 @@
         </p:nvSpPr>
         <p:spPr>
           <a:xfrm>
-            <a:off x="1188720" y="1719072"/>
-            <a:ext cx="10271455" cy="4246483"/>
+            <a:off x="685800" y="1719072"/>
+            <a:ext cx="502920" cy="3161278"/>
           </a:xfrm>
           <a:prstGeom prst="rect">
             <a:avLst/>
@@ -14121,13 +14121,196 @@
           </a:bodyPr>
           <a:lstStyle/>
           <a:p>
+            <a:pPr algn="r">
+              <a:spcAft>
+                <a:spcPts val="364"/>
+              </a:spcAft>
+            </a:pPr>
+            <a:r>
+              <a:rPr sz="1700" i="0" b="0">
+                <a:solidFill>
+                  <a:srgbClr val="858585"/>
+                </a:solidFill>
+                <a:latin typeface="Consolas"/>
+              </a:rPr>
+              <a:t>1</a:t>
+            </a:r>
+          </a:p>
+          <a:p>
+            <a:pPr algn="r">
+              <a:spcAft>
+                <a:spcPts val="364"/>
+              </a:spcAft>
+            </a:pPr>
+            <a:r>
+              <a:rPr sz="1700" i="0" b="0">
+                <a:solidFill>
+                  <a:srgbClr val="858585"/>
+                </a:solidFill>
+                <a:latin typeface="Consolas"/>
+              </a:rPr>
+              <a:t>2</a:t>
+            </a:r>
+          </a:p>
+          <a:p>
+            <a:pPr algn="r">
+              <a:spcAft>
+                <a:spcPts val="364"/>
+              </a:spcAft>
+            </a:pPr>
+            <a:r>
+              <a:rPr sz="1700" i="0" b="0">
+                <a:solidFill>
+                  <a:srgbClr val="858585"/>
+                </a:solidFill>
+                <a:latin typeface="Consolas"/>
+              </a:rPr>
+              <a:t>3</a:t>
+            </a:r>
+          </a:p>
+          <a:p>
+            <a:pPr algn="r">
+              <a:spcAft>
+                <a:spcPts val="364"/>
+              </a:spcAft>
+            </a:pPr>
+            <a:r>
+              <a:rPr sz="1700" i="0" b="0">
+                <a:solidFill>
+                  <a:srgbClr val="858585"/>
+                </a:solidFill>
+                <a:latin typeface="Consolas"/>
+              </a:rPr>
+              <a:t>4</a:t>
+            </a:r>
+          </a:p>
+          <a:p>
+            <a:pPr algn="r">
+              <a:spcAft>
+                <a:spcPts val="364"/>
+              </a:spcAft>
+            </a:pPr>
+            <a:r>
+              <a:rPr sz="1700" i="0" b="0">
+                <a:solidFill>
+                  <a:srgbClr val="858585"/>
+                </a:solidFill>
+                <a:latin typeface="Consolas"/>
+              </a:rPr>
+              <a:t>5</a:t>
+            </a:r>
+          </a:p>
+          <a:p>
+            <a:pPr algn="r">
+              <a:spcAft>
+                <a:spcPts val="364"/>
+              </a:spcAft>
+            </a:pPr>
+            <a:r>
+              <a:rPr sz="1700" i="0" b="0">
+                <a:solidFill>
+                  <a:srgbClr val="858585"/>
+                </a:solidFill>
+                <a:latin typeface="Consolas"/>
+              </a:rPr>
+              <a:t>6</a:t>
+            </a:r>
+          </a:p>
+          <a:p>
+            <a:pPr algn="r">
+              <a:spcAft>
+                <a:spcPts val="364"/>
+              </a:spcAft>
+            </a:pPr>
+            <a:r>
+              <a:rPr sz="1700" i="0" b="0">
+                <a:solidFill>
+                  <a:srgbClr val="858585"/>
+                </a:solidFill>
+                <a:latin typeface="Consolas"/>
+              </a:rPr>
+              <a:t>7</a:t>
+            </a:r>
+          </a:p>
+          <a:p>
+            <a:pPr algn="r">
+              <a:spcAft>
+                <a:spcPts val="364"/>
+              </a:spcAft>
+            </a:pPr>
+            <a:r>
+              <a:rPr sz="1700" i="0" b="0">
+                <a:solidFill>
+                  <a:srgbClr val="858585"/>
+                </a:solidFill>
+                <a:latin typeface="Consolas"/>
+              </a:rPr>
+              <a:t>8</a:t>
+            </a:r>
+          </a:p>
+          <a:p>
+            <a:pPr algn="r">
+              <a:spcAft>
+                <a:spcPts val="364"/>
+              </a:spcAft>
+            </a:pPr>
+            <a:r>
+              <a:rPr sz="1700" i="0" b="0">
+                <a:solidFill>
+                  <a:srgbClr val="858585"/>
+                </a:solidFill>
+                <a:latin typeface="Consolas"/>
+              </a:rPr>
+              <a:t>9</a:t>
+            </a:r>
+          </a:p>
+          <a:p>
+            <a:pPr algn="r">
+              <a:spcAft>
+                <a:spcPts val="364"/>
+              </a:spcAft>
+            </a:pPr>
+            <a:r>
+              <a:rPr sz="1700" i="0" b="0">
+                <a:solidFill>
+                  <a:srgbClr val="858585"/>
+                </a:solidFill>
+                <a:latin typeface="Consolas"/>
+              </a:rPr>
+              <a:t>10</a:t>
+            </a:r>
+          </a:p>
+        </p:txBody>
+      </p:sp>
+      <p:sp>
+        <p:nvSpPr>
+          <p:cNvPr id="12" name="TextBox 11"/>
+          <p:cNvSpPr txBox="1"/>
+          <p:nvPr/>
+        </p:nvSpPr>
+        <p:spPr>
+          <a:xfrm>
+            <a:off x="1188720" y="1719072"/>
+            <a:ext cx="10271455" cy="3161278"/>
+          </a:xfrm>
+          <a:prstGeom prst="rect">
+            <a:avLst/>
+          </a:prstGeom>
+          <a:noFill/>
+        </p:spPr>
+        <p:txBody>
+          <a:bodyPr wrap="square">
+            <a:spAutoFit/>
+          </a:bodyPr>
+          <a:lstStyle/>
+          <a:p>
             <a:pPr>
               <a:spcAft>
-                <a:spcPts val="428"/>
+                <a:spcPts val="364"/>
               </a:spcAft>
             </a:pPr>
             <a:r>
-              <a:rPr sz="2000" i="1" b="0">
+              <a:rPr sz="1700" i="1" b="0">
                 <a:solidFill>
                   <a:srgbClr val="6A9955"/>
                 </a:solidFill>
@@ -14139,11 +14322,11 @@
           <a:p>
             <a:pPr>
               <a:spcAft>
-                <a:spcPts val="428"/>
+                <a:spcPts val="364"/>
               </a:spcAft>
             </a:pPr>
             <a:r>
-              <a:rPr sz="2000" i="0" b="0">
+              <a:rPr sz="1700" i="0" b="0">
                 <a:solidFill>
                   <a:srgbClr val="569CD6"/>
                 </a:solidFill>
@@ -14152,7 +14335,7 @@
               <a:t>UPDATE</a:t>
             </a:r>
             <a:r>
-              <a:rPr sz="2000" i="0" b="0">
+              <a:rPr sz="1700" i="0" b="0">
                 <a:solidFill>
                   <a:srgbClr val="D4D4D4"/>
                 </a:solidFill>
@@ -14161,7 +14344,7 @@
               <a:t> </a:t>
             </a:r>
             <a:r>
-              <a:rPr sz="2000" i="0" b="0">
+              <a:rPr sz="1700" i="0" b="0">
                 <a:solidFill>
                   <a:srgbClr val="D4D4D4"/>
                 </a:solidFill>
@@ -14170,7 +14353,7 @@
               <a:t>mascota</a:t>
             </a:r>
             <a:r>
-              <a:rPr sz="2000" i="0" b="0">
+              <a:rPr sz="1700" i="0" b="0">
                 <a:solidFill>
                   <a:srgbClr val="D4D4D4"/>
                 </a:solidFill>
@@ -14179,7 +14362,7 @@
               <a:t> </a:t>
             </a:r>
             <a:r>
-              <a:rPr sz="2000" i="0" b="0">
+              <a:rPr sz="1700" i="0" b="0">
                 <a:solidFill>
                   <a:srgbClr val="569CD6"/>
                 </a:solidFill>
@@ -14188,7 +14371,7 @@
               <a:t>SET</a:t>
             </a:r>
             <a:r>
-              <a:rPr sz="2000" i="0" b="0">
+              <a:rPr sz="1700" i="0" b="0">
                 <a:solidFill>
                   <a:srgbClr val="D4D4D4"/>
                 </a:solidFill>
@@ -14197,7 +14380,7 @@
               <a:t> </a:t>
             </a:r>
             <a:r>
-              <a:rPr sz="2000" i="0" b="0">
+              <a:rPr sz="1700" i="0" b="0">
                 <a:solidFill>
                   <a:srgbClr val="D4D4D4"/>
                 </a:solidFill>
@@ -14206,7 +14389,7 @@
               <a:t>activa</a:t>
             </a:r>
             <a:r>
-              <a:rPr sz="2000" i="0" b="0">
+              <a:rPr sz="1700" i="0" b="0">
                 <a:solidFill>
                   <a:srgbClr val="D4D4D4"/>
                 </a:solidFill>
@@ -14215,7 +14398,7 @@
               <a:t> = </a:t>
             </a:r>
             <a:r>
-              <a:rPr sz="2000" i="0" b="0">
+              <a:rPr sz="1700" i="0" b="0">
                 <a:solidFill>
                   <a:srgbClr val="CE9178"/>
                 </a:solidFill>
@@ -14224,7 +14407,7 @@
               <a:t>'N'</a:t>
             </a:r>
             <a:r>
-              <a:rPr sz="2000" i="0" b="0">
+              <a:rPr sz="1700" i="0" b="0">
                 <a:solidFill>
                   <a:srgbClr val="D4D4D4"/>
                 </a:solidFill>
@@ -14233,7 +14416,7 @@
               <a:t> </a:t>
             </a:r>
             <a:r>
-              <a:rPr sz="2000" i="0" b="0">
+              <a:rPr sz="1700" i="0" b="0">
                 <a:solidFill>
                   <a:srgbClr val="569CD6"/>
                 </a:solidFill>
@@ -14242,7 +14425,7 @@
               <a:t>WHERE</a:t>
             </a:r>
             <a:r>
-              <a:rPr sz="2000" i="0" b="0">
+              <a:rPr sz="1700" i="0" b="0">
                 <a:solidFill>
                   <a:srgbClr val="D4D4D4"/>
                 </a:solidFill>
@@ -14251,7 +14434,7 @@
               <a:t> </a:t>
             </a:r>
             <a:r>
-              <a:rPr sz="2000" i="0" b="0">
+              <a:rPr sz="1700" i="0" b="0">
                 <a:solidFill>
                   <a:srgbClr val="D4D4D4"/>
                 </a:solidFill>
@@ -14260,7 +14443,7 @@
               <a:t>id_mascota</a:t>
             </a:r>
             <a:r>
-              <a:rPr sz="2000" i="0" b="0">
+              <a:rPr sz="1700" i="0" b="0">
                 <a:solidFill>
                   <a:srgbClr val="D4D4D4"/>
                 </a:solidFill>
@@ -14269,7 +14452,7 @@
               <a:t> = </a:t>
             </a:r>
             <a:r>
-              <a:rPr sz="2000" i="0" b="0">
+              <a:rPr sz="1700" i="0" b="0">
                 <a:solidFill>
                   <a:srgbClr val="B5CEA8"/>
                 </a:solidFill>
@@ -14278,7 +14461,7 @@
               <a:t>1</a:t>
             </a:r>
             <a:r>
-              <a:rPr sz="2000" i="0" b="0">
+              <a:rPr sz="1700" i="0" b="0">
                 <a:solidFill>
                   <a:srgbClr val="D4D4D4"/>
                 </a:solidFill>
@@ -14287,7 +14470,7 @@
               <a:t>;   </a:t>
             </a:r>
             <a:r>
-              <a:rPr sz="2000" i="1" b="0">
+              <a:rPr sz="1700" i="1" b="0">
                 <a:solidFill>
                   <a:srgbClr val="6A9955"/>
                 </a:solidFill>
@@ -14299,11 +14482,11 @@
           <a:p>
             <a:pPr>
               <a:spcAft>
-                <a:spcPts val="428"/>
+                <a:spcPts val="364"/>
               </a:spcAft>
             </a:pPr>
             <a:r>
-              <a:rPr sz="2000" i="0" b="0">
+              <a:rPr sz="1700" i="0" b="0">
                 <a:solidFill>
                   <a:srgbClr val="D4D4D4"/>
                 </a:solidFill>
@@ -14315,11 +14498,11 @@
           <a:p>
             <a:pPr>
               <a:spcAft>
-                <a:spcPts val="428"/>
+                <a:spcPts val="364"/>
               </a:spcAft>
             </a:pPr>
             <a:r>
-              <a:rPr sz="2000" i="0" b="0">
+              <a:rPr sz="1700" i="0" b="0">
                 <a:solidFill>
                   <a:srgbClr val="569CD6"/>
                 </a:solidFill>
@@ -14328,7 +14511,7 @@
               <a:t>INSERT</a:t>
             </a:r>
             <a:r>
-              <a:rPr sz="2000" i="0" b="0">
+              <a:rPr sz="1700" i="0" b="0">
                 <a:solidFill>
                   <a:srgbClr val="D4D4D4"/>
                 </a:solidFill>
@@ -14337,7 +14520,7 @@
               <a:t> </a:t>
             </a:r>
             <a:r>
-              <a:rPr sz="2000" i="0" b="0">
+              <a:rPr sz="1700" i="0" b="0">
                 <a:solidFill>
                   <a:srgbClr val="569CD6"/>
                 </a:solidFill>
@@ -14346,7 +14529,7 @@
               <a:t>INTO</a:t>
             </a:r>
             <a:r>
-              <a:rPr sz="2000" i="0" b="0">
+              <a:rPr sz="1700" i="0" b="0">
                 <a:solidFill>
                   <a:srgbClr val="D4D4D4"/>
                 </a:solidFill>
@@ -14355,7 +14538,7 @@
               <a:t> </a:t>
             </a:r>
             <a:r>
-              <a:rPr sz="2000" i="0" b="0">
+              <a:rPr sz="1700" i="0" b="0">
                 <a:solidFill>
                   <a:srgbClr val="DCDCAA"/>
                 </a:solidFill>
@@ -14364,7 +14547,7 @@
               <a:t>cita</a:t>
             </a:r>
             <a:r>
-              <a:rPr sz="2000" i="0" b="0">
+              <a:rPr sz="1700" i="0" b="0">
                 <a:solidFill>
                   <a:srgbClr val="D4D4D4"/>
                 </a:solidFill>
@@ -14373,7 +14556,7 @@
               <a:t> (</a:t>
             </a:r>
             <a:r>
-              <a:rPr sz="2000" i="0" b="0">
+              <a:rPr sz="1700" i="0" b="0">
                 <a:solidFill>
                   <a:srgbClr val="D4D4D4"/>
                 </a:solidFill>
@@ -14382,7 +14565,7 @@
               <a:t>id_mascota</a:t>
             </a:r>
             <a:r>
-              <a:rPr sz="2000" i="0" b="0">
+              <a:rPr sz="1700" i="0" b="0">
                 <a:solidFill>
                   <a:srgbClr val="D4D4D4"/>
                 </a:solidFill>
@@ -14391,7 +14574,7 @@
               <a:t>, </a:t>
             </a:r>
             <a:r>
-              <a:rPr sz="2000" i="0" b="0">
+              <a:rPr sz="1700" i="0" b="0">
                 <a:solidFill>
                   <a:srgbClr val="D4D4D4"/>
                 </a:solidFill>
@@ -14400,7 +14583,7 @@
               <a:t>id_veterinario</a:t>
             </a:r>
             <a:r>
-              <a:rPr sz="2000" i="0" b="0">
+              <a:rPr sz="1700" i="0" b="0">
                 <a:solidFill>
                   <a:srgbClr val="D4D4D4"/>
                 </a:solidFill>
@@ -14409,7 +14592,7 @@
               <a:t>, </a:t>
             </a:r>
             <a:r>
-              <a:rPr sz="2000" i="0" b="0">
+              <a:rPr sz="1700" i="0" b="0">
                 <a:solidFill>
                   <a:srgbClr val="D4D4D4"/>
                 </a:solidFill>
@@ -14418,7 +14601,7 @@
               <a:t>fecha_hora</a:t>
             </a:r>
             <a:r>
-              <a:rPr sz="2000" i="0" b="0">
+              <a:rPr sz="1700" i="0" b="0">
                 <a:solidFill>
                   <a:srgbClr val="D4D4D4"/>
                 </a:solidFill>
@@ -14427,7 +14610,7 @@
               <a:t>, </a:t>
             </a:r>
             <a:r>
-              <a:rPr sz="2000" i="0" b="0">
+              <a:rPr sz="1700" i="0" b="0">
                 <a:solidFill>
                   <a:srgbClr val="D4D4D4"/>
                 </a:solidFill>
@@ -14436,7 +14619,7 @@
               <a:t>estado</a:t>
             </a:r>
             <a:r>
-              <a:rPr sz="2000" i="0" b="0">
+              <a:rPr sz="1700" i="0" b="0">
                 <a:solidFill>
                   <a:srgbClr val="D4D4D4"/>
                 </a:solidFill>
@@ -14448,11 +14631,11 @@
           <a:p>
             <a:pPr>
               <a:spcAft>
-                <a:spcPts val="428"/>
+                <a:spcPts val="364"/>
               </a:spcAft>
             </a:pPr>
             <a:r>
-              <a:rPr sz="2000" i="0" b="0">
+              <a:rPr sz="1700" i="0" b="0">
                 <a:solidFill>
                   <a:srgbClr val="569CD6"/>
                 </a:solidFill>
@@ -14461,7 +14644,7 @@
               <a:t>VALUES</a:t>
             </a:r>
             <a:r>
-              <a:rPr sz="2000" i="0" b="0">
+              <a:rPr sz="1700" i="0" b="0">
                 <a:solidFill>
                   <a:srgbClr val="D4D4D4"/>
                 </a:solidFill>
@@ -14470,7 +14653,7 @@
               <a:t> (</a:t>
             </a:r>
             <a:r>
-              <a:rPr sz="2000" i="0" b="0">
+              <a:rPr sz="1700" i="0" b="0">
                 <a:solidFill>
                   <a:srgbClr val="B5CEA8"/>
                 </a:solidFill>
@@ -14479,7 +14662,7 @@
               <a:t>1</a:t>
             </a:r>
             <a:r>
-              <a:rPr sz="2000" i="0" b="0">
+              <a:rPr sz="1700" i="0" b="0">
                 <a:solidFill>
                   <a:srgbClr val="D4D4D4"/>
                 </a:solidFill>
@@ -14488,7 +14671,7 @@
               <a:t>, </a:t>
             </a:r>
             <a:r>
-              <a:rPr sz="2000" i="0" b="0">
+              <a:rPr sz="1700" i="0" b="0">
                 <a:solidFill>
                   <a:srgbClr val="B5CEA8"/>
                 </a:solidFill>
@@ -14497,7 +14680,7 @@
               <a:t>1</a:t>
             </a:r>
             <a:r>
-              <a:rPr sz="2000" i="0" b="0">
+              <a:rPr sz="1700" i="0" b="0">
                 <a:solidFill>
                   <a:srgbClr val="D4D4D4"/>
                 </a:solidFill>
@@ -14506,7 +14689,7 @@
               <a:t>, </a:t>
             </a:r>
             <a:r>
-              <a:rPr sz="2000" i="0" b="0">
+              <a:rPr sz="1700" i="0" b="0">
                 <a:solidFill>
                   <a:srgbClr val="4EC9B0"/>
                 </a:solidFill>
@@ -14515,7 +14698,7 @@
               <a:t>TIMESTAMP</a:t>
             </a:r>
             <a:r>
-              <a:rPr sz="2000" i="0" b="0">
+              <a:rPr sz="1700" i="0" b="0">
                 <a:solidFill>
                   <a:srgbClr val="D4D4D4"/>
                 </a:solidFill>
@@ -14524,7 +14707,7 @@
               <a:t> </a:t>
             </a:r>
             <a:r>
-              <a:rPr sz="2000" i="0" b="0">
+              <a:rPr sz="1700" i="0" b="0">
                 <a:solidFill>
                   <a:srgbClr val="CE9178"/>
                 </a:solidFill>
@@ -14533,7 +14716,7 @@
               <a:t>'2026-09-02 08:00:00'</a:t>
             </a:r>
             <a:r>
-              <a:rPr sz="2000" i="0" b="0">
+              <a:rPr sz="1700" i="0" b="0">
                 <a:solidFill>
                   <a:srgbClr val="D4D4D4"/>
                 </a:solidFill>
@@ -14542,7 +14725,7 @@
               <a:t>, </a:t>
             </a:r>
             <a:r>
-              <a:rPr sz="2000" i="0" b="0">
+              <a:rPr sz="1700" i="0" b="0">
                 <a:solidFill>
                   <a:srgbClr val="CE9178"/>
                 </a:solidFill>
@@ -14551,7 +14734,7 @@
               <a:t>'PROGRAMADA'</a:t>
             </a:r>
             <a:r>
-              <a:rPr sz="2000" i="0" b="0">
+              <a:rPr sz="1700" i="0" b="0">
                 <a:solidFill>
                   <a:srgbClr val="D4D4D4"/>
                 </a:solidFill>
@@ -14563,11 +14746,11 @@
           <a:p>
             <a:pPr>
               <a:spcAft>
-                <a:spcPts val="428"/>
+                <a:spcPts val="364"/>
               </a:spcAft>
             </a:pPr>
             <a:r>
-              <a:rPr sz="2000" i="1" b="0">
+              <a:rPr sz="1700" i="1" b="0">
                 <a:solidFill>
                   <a:srgbClr val="6A9955"/>
                 </a:solidFill>
@@ -14579,11 +14762,11 @@
           <a:p>
             <a:pPr>
               <a:spcAft>
-                <a:spcPts val="428"/>
+                <a:spcPts val="364"/>
               </a:spcAft>
             </a:pPr>
             <a:r>
-              <a:rPr sz="2000" i="0" b="0">
+              <a:rPr sz="1700" i="0" b="0">
                 <a:solidFill>
                   <a:srgbClr val="D4D4D4"/>
                 </a:solidFill>
@@ -14595,11 +14778,11 @@
           <a:p>
             <a:pPr>
               <a:spcAft>
-                <a:spcPts val="428"/>
+                <a:spcPts val="364"/>
               </a:spcAft>
             </a:pPr>
             <a:r>
-              <a:rPr sz="2000" i="1" b="0">
+              <a:rPr sz="1700" i="1" b="0">
                 <a:solidFill>
                   <a:srgbClr val="6A9955"/>
                 </a:solidFill>
@@ -14611,11 +14794,11 @@
           <a:p>
             <a:pPr>
               <a:spcAft>
-                <a:spcPts val="428"/>
+                <a:spcPts val="364"/>
               </a:spcAft>
             </a:pPr>
             <a:r>
-              <a:rPr sz="2000" i="1" b="0">
+              <a:rPr sz="1700" i="1" b="0">
                 <a:solidFill>
                   <a:srgbClr val="6A9955"/>
                 </a:solidFill>
@@ -14627,11 +14810,11 @@
           <a:p>
             <a:pPr>
               <a:spcAft>
-                <a:spcPts val="428"/>
+                <a:spcPts val="364"/>
               </a:spcAft>
             </a:pPr>
             <a:r>
-              <a:rPr sz="2000" i="1" b="0">
+              <a:rPr sz="1700" i="1" b="0">
                 <a:solidFill>
                   <a:srgbClr val="6A9955"/>
                 </a:solidFill>
@@ -14644,7 +14827,7 @@
       </p:sp>
       <p:sp>
         <p:nvSpPr>
-          <p:cNvPr id="12" name="TextBox 11"/>
+          <p:cNvPr id="13" name="TextBox 12"/>
           <p:cNvSpPr txBox="1"/>
           <p:nvPr/>
         </p:nvSpPr>
@@ -24471,7 +24654,7 @@
         <p:spPr>
           <a:xfrm>
             <a:off x="457200" y="1261872"/>
-            <a:ext cx="11277295" cy="4220725"/>
+            <a:ext cx="11277295" cy="4065696"/>
           </a:xfrm>
           <a:prstGeom prst="roundRect">
             <a:avLst>
@@ -24721,7 +24904,7 @@
         <p:spPr>
           <a:xfrm>
             <a:off x="685800" y="1719072"/>
-            <a:ext cx="502920" cy="3626365"/>
+            <a:ext cx="502920" cy="3471336"/>
           </a:xfrm>
           <a:prstGeom prst="rect">
             <a:avLst/>
@@ -24736,11 +24919,11 @@
           <a:p>
             <a:pPr algn="r">
               <a:spcAft>
-                <a:spcPts val="428"/>
+                <a:spcPts val="407"/>
               </a:spcAft>
             </a:pPr>
             <a:r>
-              <a:rPr sz="2000" i="0" b="0">
+              <a:rPr sz="1900" i="0" b="0">
                 <a:solidFill>
                   <a:srgbClr val="858585"/>
                 </a:solidFill>
@@ -24752,11 +24935,11 @@
           <a:p>
             <a:pPr algn="r">
               <a:spcAft>
-                <a:spcPts val="428"/>
+                <a:spcPts val="407"/>
               </a:spcAft>
             </a:pPr>
             <a:r>
-              <a:rPr sz="2000" i="0" b="0">
+              <a:rPr sz="1900" i="0" b="0">
                 <a:solidFill>
                   <a:srgbClr val="858585"/>
                 </a:solidFill>
@@ -24768,11 +24951,11 @@
           <a:p>
             <a:pPr algn="r">
               <a:spcAft>
-                <a:spcPts val="428"/>
+                <a:spcPts val="407"/>
               </a:spcAft>
             </a:pPr>
             <a:r>
-              <a:rPr sz="2000" i="0" b="0">
+              <a:rPr sz="1900" i="0" b="0">
                 <a:solidFill>
                   <a:srgbClr val="858585"/>
                 </a:solidFill>
@@ -24784,11 +24967,11 @@
           <a:p>
             <a:pPr algn="r">
               <a:spcAft>
-                <a:spcPts val="428"/>
+                <a:spcPts val="407"/>
               </a:spcAft>
             </a:pPr>
             <a:r>
-              <a:rPr sz="2000" i="0" b="0">
+              <a:rPr sz="1900" i="0" b="0">
                 <a:solidFill>
                   <a:srgbClr val="858585"/>
                 </a:solidFill>
@@ -24800,11 +24983,11 @@
           <a:p>
             <a:pPr algn="r">
               <a:spcAft>
-                <a:spcPts val="428"/>
+                <a:spcPts val="407"/>
               </a:spcAft>
             </a:pPr>
             <a:r>
-              <a:rPr sz="2000" i="0" b="0">
+              <a:rPr sz="1900" i="0" b="0">
                 <a:solidFill>
                   <a:srgbClr val="858585"/>
                 </a:solidFill>
@@ -24816,11 +24999,11 @@
           <a:p>
             <a:pPr algn="r">
               <a:spcAft>
-                <a:spcPts val="428"/>
+                <a:spcPts val="407"/>
               </a:spcAft>
             </a:pPr>
             <a:r>
-              <a:rPr sz="2000" i="0" b="0">
+              <a:rPr sz="1900" i="0" b="0">
                 <a:solidFill>
                   <a:srgbClr val="858585"/>
                 </a:solidFill>
@@ -24832,11 +25015,11 @@
           <a:p>
             <a:pPr algn="r">
               <a:spcAft>
-                <a:spcPts val="428"/>
+                <a:spcPts val="407"/>
               </a:spcAft>
             </a:pPr>
             <a:r>
-              <a:rPr sz="2000" i="0" b="0">
+              <a:rPr sz="1900" i="0" b="0">
                 <a:solidFill>
                   <a:srgbClr val="858585"/>
                 </a:solidFill>
@@ -24848,11 +25031,11 @@
           <a:p>
             <a:pPr algn="r">
               <a:spcAft>
-                <a:spcPts val="428"/>
+                <a:spcPts val="407"/>
               </a:spcAft>
             </a:pPr>
             <a:r>
-              <a:rPr sz="2000" i="0" b="0">
+              <a:rPr sz="1900" i="0" b="0">
                 <a:solidFill>
                   <a:srgbClr val="858585"/>
                 </a:solidFill>
@@ -24864,11 +25047,11 @@
           <a:p>
             <a:pPr algn="r">
               <a:spcAft>
-                <a:spcPts val="428"/>
+                <a:spcPts val="407"/>
               </a:spcAft>
             </a:pPr>
             <a:r>
-              <a:rPr sz="2000" i="0" b="0">
+              <a:rPr sz="1900" i="0" b="0">
                 <a:solidFill>
                   <a:srgbClr val="858585"/>
                 </a:solidFill>
@@ -24880,11 +25063,11 @@
           <a:p>
             <a:pPr algn="r">
               <a:spcAft>
-                <a:spcPts val="428"/>
+                <a:spcPts val="407"/>
               </a:spcAft>
             </a:pPr>
             <a:r>
-              <a:rPr sz="2000" i="0" b="0">
+              <a:rPr sz="1900" i="0" b="0">
                 <a:solidFill>
                   <a:srgbClr val="858585"/>
                 </a:solidFill>
@@ -24904,7 +25087,7 @@
         <p:spPr>
           <a:xfrm>
             <a:off x="1188720" y="1719072"/>
-            <a:ext cx="10271455" cy="3626365"/>
+            <a:ext cx="10271455" cy="3471336"/>
           </a:xfrm>
           <a:prstGeom prst="rect">
             <a:avLst/>
@@ -24919,11 +25102,11 @@
           <a:p>
             <a:pPr>
               <a:spcAft>
-                <a:spcPts val="428"/>
+                <a:spcPts val="407"/>
               </a:spcAft>
             </a:pPr>
             <a:r>
-              <a:rPr sz="2000" i="1" b="0">
+              <a:rPr sz="1900" i="1" b="0">
                 <a:solidFill>
                   <a:srgbClr val="6A9955"/>
                 </a:solidFill>
@@ -24935,11 +25118,11 @@
           <a:p>
             <a:pPr>
               <a:spcAft>
-                <a:spcPts val="428"/>
+                <a:spcPts val="407"/>
               </a:spcAft>
             </a:pPr>
             <a:r>
-              <a:rPr sz="2000" i="0" b="0">
+              <a:rPr sz="1900" i="0" b="0">
                 <a:solidFill>
                   <a:srgbClr val="569CD6"/>
                 </a:solidFill>
@@ -24948,7 +25131,7 @@
               <a:t>CREATE</a:t>
             </a:r>
             <a:r>
-              <a:rPr sz="2000" i="0" b="0">
+              <a:rPr sz="1900" i="0" b="0">
                 <a:solidFill>
                   <a:srgbClr val="D4D4D4"/>
                 </a:solidFill>
@@ -24957,7 +25140,7 @@
               <a:t> </a:t>
             </a:r>
             <a:r>
-              <a:rPr sz="2000" i="0" b="0">
+              <a:rPr sz="1900" i="0" b="0">
                 <a:solidFill>
                   <a:srgbClr val="569CD6"/>
                 </a:solidFill>
@@ -24966,7 +25149,7 @@
               <a:t>TABLE</a:t>
             </a:r>
             <a:r>
-              <a:rPr sz="2000" i="0" b="0">
+              <a:rPr sz="1900" i="0" b="0">
                 <a:solidFill>
                   <a:srgbClr val="D4D4D4"/>
                 </a:solidFill>
@@ -24975,7 +25158,7 @@
               <a:t> </a:t>
             </a:r>
             <a:r>
-              <a:rPr sz="2000" i="0" b="0">
+              <a:rPr sz="1900" i="0" b="0">
                 <a:solidFill>
                   <a:srgbClr val="DCDCAA"/>
                 </a:solidFill>
@@ -24984,7 +25167,7 @@
               <a:t>veterinario</a:t>
             </a:r>
             <a:r>
-              <a:rPr sz="2000" i="0" b="0">
+              <a:rPr sz="1900" i="0" b="0">
                 <a:solidFill>
                   <a:srgbClr val="D4D4D4"/>
                 </a:solidFill>
@@ -24996,11 +25179,11 @@
           <a:p>
             <a:pPr>
               <a:spcAft>
-                <a:spcPts val="428"/>
+                <a:spcPts val="407"/>
               </a:spcAft>
             </a:pPr>
             <a:r>
-              <a:rPr sz="2000" i="0" b="0">
+              <a:rPr sz="1900" i="0" b="0">
                 <a:solidFill>
                   <a:srgbClr val="D4D4D4"/>
                 </a:solidFill>
@@ -25009,7 +25192,7 @@
               <a:t>  </a:t>
             </a:r>
             <a:r>
-              <a:rPr sz="2000" i="0" b="0">
+              <a:rPr sz="1900" i="0" b="0">
                 <a:solidFill>
                   <a:srgbClr val="D4D4D4"/>
                 </a:solidFill>
@@ -25018,7 +25201,7 @@
               <a:t>id_veterinario</a:t>
             </a:r>
             <a:r>
-              <a:rPr sz="2000" i="0" b="0">
+              <a:rPr sz="1900" i="0" b="0">
                 <a:solidFill>
                   <a:srgbClr val="D4D4D4"/>
                 </a:solidFill>
@@ -25027,7 +25210,7 @@
               <a:t> </a:t>
             </a:r>
             <a:r>
-              <a:rPr sz="2000" i="0" b="0">
+              <a:rPr sz="1900" i="0" b="0">
                 <a:solidFill>
                   <a:srgbClr val="4EC9B0"/>
                 </a:solidFill>
@@ -25036,7 +25219,7 @@
               <a:t>SERIAL</a:t>
             </a:r>
             <a:r>
-              <a:rPr sz="2000" i="0" b="0">
+              <a:rPr sz="1900" i="0" b="0">
                 <a:solidFill>
                   <a:srgbClr val="D4D4D4"/>
                 </a:solidFill>
@@ -25045,7 +25228,7 @@
               <a:t> </a:t>
             </a:r>
             <a:r>
-              <a:rPr sz="2000" i="0" b="0">
+              <a:rPr sz="1900" i="0" b="0">
                 <a:solidFill>
                   <a:srgbClr val="569CD6"/>
                 </a:solidFill>
@@ -25054,7 +25237,7 @@
               <a:t>PRIMARY</a:t>
             </a:r>
             <a:r>
-              <a:rPr sz="2000" i="0" b="0">
+              <a:rPr sz="1900" i="0" b="0">
                 <a:solidFill>
                   <a:srgbClr val="D4D4D4"/>
                 </a:solidFill>
@@ -25063,7 +25246,7 @@
               <a:t> </a:t>
             </a:r>
             <a:r>
-              <a:rPr sz="2000" i="0" b="0">
+              <a:rPr sz="1900" i="0" b="0">
                 <a:solidFill>
                   <a:srgbClr val="569CD6"/>
                 </a:solidFill>
@@ -25072,7 +25255,7 @@
               <a:t>KEY</a:t>
             </a:r>
             <a:r>
-              <a:rPr sz="2000" i="0" b="0">
+              <a:rPr sz="1900" i="0" b="0">
                 <a:solidFill>
                   <a:srgbClr val="D4D4D4"/>
                 </a:solidFill>
@@ -25081,7 +25264,7 @@
               <a:t>,      </a:t>
             </a:r>
             <a:r>
-              <a:rPr sz="2000" i="1" b="0">
+              <a:rPr sz="1900" i="1" b="0">
                 <a:solidFill>
                   <a:srgbClr val="6A9955"/>
                 </a:solidFill>
@@ -25093,11 +25276,11 @@
           <a:p>
             <a:pPr>
               <a:spcAft>
-                <a:spcPts val="428"/>
+                <a:spcPts val="407"/>
               </a:spcAft>
             </a:pPr>
             <a:r>
-              <a:rPr sz="2000" i="0" b="0">
+              <a:rPr sz="1900" i="0" b="0">
                 <a:solidFill>
                   <a:srgbClr val="D4D4D4"/>
                 </a:solidFill>
@@ -25106,7 +25289,7 @@
               <a:t>  </a:t>
             </a:r>
             <a:r>
-              <a:rPr sz="2000" i="0" b="0">
+              <a:rPr sz="1900" i="0" b="0">
                 <a:solidFill>
                   <a:srgbClr val="D4D4D4"/>
                 </a:solidFill>
@@ -25115,7 +25298,7 @@
               <a:t>tarjeta_prof</a:t>
             </a:r>
             <a:r>
-              <a:rPr sz="2000" i="0" b="0">
+              <a:rPr sz="1900" i="0" b="0">
                 <a:solidFill>
                   <a:srgbClr val="D4D4D4"/>
                 </a:solidFill>
@@ -25124,7 +25307,7 @@
               <a:t>   </a:t>
             </a:r>
             <a:r>
-              <a:rPr sz="2000" i="0" b="0">
+              <a:rPr sz="1900" i="0" b="0">
                 <a:solidFill>
                   <a:srgbClr val="4EC9B0"/>
                 </a:solidFill>
@@ -25133,7 +25316,7 @@
               <a:t>VARCHAR</a:t>
             </a:r>
             <a:r>
-              <a:rPr sz="2000" i="0" b="0">
+              <a:rPr sz="1900" i="0" b="0">
                 <a:solidFill>
                   <a:srgbClr val="D4D4D4"/>
                 </a:solidFill>
@@ -25142,7 +25325,7 @@
               <a:t>(</a:t>
             </a:r>
             <a:r>
-              <a:rPr sz="2000" i="0" b="0">
+              <a:rPr sz="1900" i="0" b="0">
                 <a:solidFill>
                   <a:srgbClr val="B5CEA8"/>
                 </a:solidFill>
@@ -25151,7 +25334,7 @@
               <a:t>30</a:t>
             </a:r>
             <a:r>
-              <a:rPr sz="2000" i="0" b="0">
+              <a:rPr sz="1900" i="0" b="0">
                 <a:solidFill>
                   <a:srgbClr val="D4D4D4"/>
                 </a:solidFill>
@@ -25160,7 +25343,7 @@
               <a:t>) </a:t>
             </a:r>
             <a:r>
-              <a:rPr sz="2000" i="0" b="0">
+              <a:rPr sz="1900" i="0" b="0">
                 <a:solidFill>
                   <a:srgbClr val="569CD6"/>
                 </a:solidFill>
@@ -25169,7 +25352,7 @@
               <a:t>UNIQUE</a:t>
             </a:r>
             <a:r>
-              <a:rPr sz="2000" i="0" b="0">
+              <a:rPr sz="1900" i="0" b="0">
                 <a:solidFill>
                   <a:srgbClr val="D4D4D4"/>
                 </a:solidFill>
@@ -25178,7 +25361,7 @@
               <a:t>,      </a:t>
             </a:r>
             <a:r>
-              <a:rPr sz="2000" i="1" b="0">
+              <a:rPr sz="1900" i="1" b="0">
                 <a:solidFill>
                   <a:srgbClr val="6A9955"/>
                 </a:solidFill>
@@ -25190,11 +25373,11 @@
           <a:p>
             <a:pPr>
               <a:spcAft>
-                <a:spcPts val="428"/>
+                <a:spcPts val="407"/>
               </a:spcAft>
             </a:pPr>
             <a:r>
-              <a:rPr sz="2000" i="0" b="0">
+              <a:rPr sz="1900" i="0" b="0">
                 <a:solidFill>
                   <a:srgbClr val="D4D4D4"/>
                 </a:solidFill>
@@ -25203,7 +25386,7 @@
               <a:t>  </a:t>
             </a:r>
             <a:r>
-              <a:rPr sz="2000" i="0" b="0">
+              <a:rPr sz="1900" i="0" b="0">
                 <a:solidFill>
                   <a:srgbClr val="D4D4D4"/>
                 </a:solidFill>
@@ -25212,7 +25395,7 @@
               <a:t>nombre</a:t>
             </a:r>
             <a:r>
-              <a:rPr sz="2000" i="0" b="0">
+              <a:rPr sz="1900" i="0" b="0">
                 <a:solidFill>
                   <a:srgbClr val="D4D4D4"/>
                 </a:solidFill>
@@ -25221,7 +25404,7 @@
               <a:t>         </a:t>
             </a:r>
             <a:r>
-              <a:rPr sz="2000" i="0" b="0">
+              <a:rPr sz="1900" i="0" b="0">
                 <a:solidFill>
                   <a:srgbClr val="4EC9B0"/>
                 </a:solidFill>
@@ -25230,7 +25413,7 @@
               <a:t>VARCHAR</a:t>
             </a:r>
             <a:r>
-              <a:rPr sz="2000" i="0" b="0">
+              <a:rPr sz="1900" i="0" b="0">
                 <a:solidFill>
                   <a:srgbClr val="D4D4D4"/>
                 </a:solidFill>
@@ -25239,7 +25422,7 @@
               <a:t>(</a:t>
             </a:r>
             <a:r>
-              <a:rPr sz="2000" i="0" b="0">
+              <a:rPr sz="1900" i="0" b="0">
                 <a:solidFill>
                   <a:srgbClr val="B5CEA8"/>
                 </a:solidFill>
@@ -25248,7 +25431,7 @@
               <a:t>80</a:t>
             </a:r>
             <a:r>
-              <a:rPr sz="2000" i="0" b="0">
+              <a:rPr sz="1900" i="0" b="0">
                 <a:solidFill>
                   <a:srgbClr val="D4D4D4"/>
                 </a:solidFill>
@@ -25257,7 +25440,7 @@
               <a:t>) </a:t>
             </a:r>
             <a:r>
-              <a:rPr sz="2000" i="0" b="0">
+              <a:rPr sz="1900" i="0" b="0">
                 <a:solidFill>
                   <a:srgbClr val="569CD6"/>
                 </a:solidFill>
@@ -25266,7 +25449,7 @@
               <a:t>NOT</a:t>
             </a:r>
             <a:r>
-              <a:rPr sz="2000" i="0" b="0">
+              <a:rPr sz="1900" i="0" b="0">
                 <a:solidFill>
                   <a:srgbClr val="D4D4D4"/>
                 </a:solidFill>
@@ -25275,7 +25458,7 @@
               <a:t> </a:t>
             </a:r>
             <a:r>
-              <a:rPr sz="2000" i="0" b="0">
+              <a:rPr sz="1900" i="0" b="0">
                 <a:solidFill>
                   <a:srgbClr val="569CD6"/>
                 </a:solidFill>
@@ -25284,7 +25467,7 @@
               <a:t>NULL</a:t>
             </a:r>
             <a:r>
-              <a:rPr sz="2000" i="0" b="0">
+              <a:rPr sz="1900" i="0" b="0">
                 <a:solidFill>
                   <a:srgbClr val="D4D4D4"/>
                 </a:solidFill>
@@ -25293,7 +25476,7 @@
               <a:t>,    </a:t>
             </a:r>
             <a:r>
-              <a:rPr sz="2000" i="1" b="0">
+              <a:rPr sz="1900" i="1" b="0">
                 <a:solidFill>
                   <a:srgbClr val="6A9955"/>
                 </a:solidFill>
@@ -25305,11 +25488,11 @@
           <a:p>
             <a:pPr>
               <a:spcAft>
-                <a:spcPts val="428"/>
+                <a:spcPts val="407"/>
               </a:spcAft>
             </a:pPr>
             <a:r>
-              <a:rPr sz="2000" i="0" b="0">
+              <a:rPr sz="1900" i="0" b="0">
                 <a:solidFill>
                   <a:srgbClr val="D4D4D4"/>
                 </a:solidFill>
@@ -25318,7 +25501,7 @@
               <a:t>  </a:t>
             </a:r>
             <a:r>
-              <a:rPr sz="2000" i="0" b="0">
+              <a:rPr sz="1900" i="0" b="0">
                 <a:solidFill>
                   <a:srgbClr val="D4D4D4"/>
                 </a:solidFill>
@@ -25327,7 +25510,7 @@
               <a:t>especialidad</a:t>
             </a:r>
             <a:r>
-              <a:rPr sz="2000" i="0" b="0">
+              <a:rPr sz="1900" i="0" b="0">
                 <a:solidFill>
                   <a:srgbClr val="D4D4D4"/>
                 </a:solidFill>
@@ -25336,7 +25519,7 @@
               <a:t>   </a:t>
             </a:r>
             <a:r>
-              <a:rPr sz="2000" i="0" b="0">
+              <a:rPr sz="1900" i="0" b="0">
                 <a:solidFill>
                   <a:srgbClr val="4EC9B0"/>
                 </a:solidFill>
@@ -25345,7 +25528,7 @@
               <a:t>VARCHAR</a:t>
             </a:r>
             <a:r>
-              <a:rPr sz="2000" i="0" b="0">
+              <a:rPr sz="1900" i="0" b="0">
                 <a:solidFill>
                   <a:srgbClr val="D4D4D4"/>
                 </a:solidFill>
@@ -25354,7 +25537,7 @@
               <a:t>(</a:t>
             </a:r>
             <a:r>
-              <a:rPr sz="2000" i="0" b="0">
+              <a:rPr sz="1900" i="0" b="0">
                 <a:solidFill>
                   <a:srgbClr val="B5CEA8"/>
                 </a:solidFill>
@@ -25363,7 +25546,7 @@
               <a:t>40</a:t>
             </a:r>
             <a:r>
-              <a:rPr sz="2000" i="0" b="0">
+              <a:rPr sz="1900" i="0" b="0">
                 <a:solidFill>
                   <a:srgbClr val="D4D4D4"/>
                 </a:solidFill>
@@ -25372,7 +25555,7 @@
               <a:t>) </a:t>
             </a:r>
             <a:r>
-              <a:rPr sz="2000" i="0" b="0">
+              <a:rPr sz="1900" i="0" b="0">
                 <a:solidFill>
                   <a:srgbClr val="569CD6"/>
                 </a:solidFill>
@@ -25381,7 +25564,7 @@
               <a:t>NOT</a:t>
             </a:r>
             <a:r>
-              <a:rPr sz="2000" i="0" b="0">
+              <a:rPr sz="1900" i="0" b="0">
                 <a:solidFill>
                   <a:srgbClr val="D4D4D4"/>
                 </a:solidFill>
@@ -25390,7 +25573,7 @@
               <a:t> </a:t>
             </a:r>
             <a:r>
-              <a:rPr sz="2000" i="0" b="0">
+              <a:rPr sz="1900" i="0" b="0">
                 <a:solidFill>
                   <a:srgbClr val="569CD6"/>
                 </a:solidFill>
@@ -25402,11 +25585,11 @@
           <a:p>
             <a:pPr>
               <a:spcAft>
-                <a:spcPts val="428"/>
+                <a:spcPts val="407"/>
               </a:spcAft>
             </a:pPr>
             <a:r>
-              <a:rPr sz="2000" i="0" b="0">
+              <a:rPr sz="1900" i="0" b="0">
                 <a:solidFill>
                   <a:srgbClr val="D4D4D4"/>
                 </a:solidFill>
@@ -25415,7 +25598,7 @@
               <a:t>    </a:t>
             </a:r>
             <a:r>
-              <a:rPr sz="2000" i="0" b="0">
+              <a:rPr sz="1900" i="0" b="0">
                 <a:solidFill>
                   <a:srgbClr val="569CD6"/>
                 </a:solidFill>
@@ -25424,7 +25607,7 @@
               <a:t>CHECK</a:t>
             </a:r>
             <a:r>
-              <a:rPr sz="2000" i="0" b="0">
+              <a:rPr sz="1900" i="0" b="0">
                 <a:solidFill>
                   <a:srgbClr val="D4D4D4"/>
                 </a:solidFill>
@@ -25433,7 +25616,7 @@
               <a:t> (</a:t>
             </a:r>
             <a:r>
-              <a:rPr sz="2000" i="0" b="0">
+              <a:rPr sz="1900" i="0" b="0">
                 <a:solidFill>
                   <a:srgbClr val="D4D4D4"/>
                 </a:solidFill>
@@ -25442,7 +25625,7 @@
               <a:t>especialidad</a:t>
             </a:r>
             <a:r>
-              <a:rPr sz="2000" i="0" b="0">
+              <a:rPr sz="1900" i="0" b="0">
                 <a:solidFill>
                   <a:srgbClr val="D4D4D4"/>
                 </a:solidFill>
@@ -25451,7 +25634,7 @@
               <a:t> </a:t>
             </a:r>
             <a:r>
-              <a:rPr sz="2000" i="0" b="0">
+              <a:rPr sz="1900" i="0" b="0">
                 <a:solidFill>
                   <a:srgbClr val="569CD6"/>
                 </a:solidFill>
@@ -25460,7 +25643,7 @@
               <a:t>IN</a:t>
             </a:r>
             <a:r>
-              <a:rPr sz="2000" i="0" b="0">
+              <a:rPr sz="1900" i="0" b="0">
                 <a:solidFill>
                   <a:srgbClr val="D4D4D4"/>
                 </a:solidFill>
@@ -25469,7 +25652,7 @@
               <a:t> (</a:t>
             </a:r>
             <a:r>
-              <a:rPr sz="2000" i="0" b="0">
+              <a:rPr sz="1900" i="0" b="0">
                 <a:solidFill>
                   <a:srgbClr val="CE9178"/>
                 </a:solidFill>
@@ -25478,7 +25661,7 @@
               <a:t>'GENERAL'</a:t>
             </a:r>
             <a:r>
-              <a:rPr sz="2000" i="0" b="0">
+              <a:rPr sz="1900" i="0" b="0">
                 <a:solidFill>
                   <a:srgbClr val="D4D4D4"/>
                 </a:solidFill>
@@ -25487,7 +25670,7 @@
               <a:t>,</a:t>
             </a:r>
             <a:r>
-              <a:rPr sz="2000" i="0" b="0">
+              <a:rPr sz="1900" i="0" b="0">
                 <a:solidFill>
                   <a:srgbClr val="CE9178"/>
                 </a:solidFill>
@@ -25496,7 +25679,7 @@
               <a:t>'CIRUGIA'</a:t>
             </a:r>
             <a:r>
-              <a:rPr sz="2000" i="0" b="0">
+              <a:rPr sz="1900" i="0" b="0">
                 <a:solidFill>
                   <a:srgbClr val="D4D4D4"/>
                 </a:solidFill>
@@ -25505,7 +25688,7 @@
               <a:t>,</a:t>
             </a:r>
             <a:r>
-              <a:rPr sz="2000" i="0" b="0">
+              <a:rPr sz="1900" i="0" b="0">
                 <a:solidFill>
                   <a:srgbClr val="CE9178"/>
                 </a:solidFill>
@@ -25514,7 +25697,7 @@
               <a:t>'DERMATOLOGIA'</a:t>
             </a:r>
             <a:r>
-              <a:rPr sz="2000" i="0" b="0">
+              <a:rPr sz="1900" i="0" b="0">
                 <a:solidFill>
                   <a:srgbClr val="D4D4D4"/>
                 </a:solidFill>
@@ -25526,11 +25709,11 @@
           <a:p>
             <a:pPr>
               <a:spcAft>
-                <a:spcPts val="428"/>
+                <a:spcPts val="407"/>
               </a:spcAft>
             </a:pPr>
             <a:r>
-              <a:rPr sz="2000" i="0" b="0">
+              <a:rPr sz="1900" i="0" b="0">
                 <a:solidFill>
                   <a:srgbClr val="D4D4D4"/>
                 </a:solidFill>
@@ -25539,7 +25722,7 @@
               <a:t>  </a:t>
             </a:r>
             <a:r>
-              <a:rPr sz="2000" i="0" b="0">
+              <a:rPr sz="1900" i="0" b="0">
                 <a:solidFill>
                   <a:srgbClr val="D4D4D4"/>
                 </a:solidFill>
@@ -25548,7 +25731,7 @@
               <a:t>activo</a:t>
             </a:r>
             <a:r>
-              <a:rPr sz="2000" i="0" b="0">
+              <a:rPr sz="1900" i="0" b="0">
                 <a:solidFill>
                   <a:srgbClr val="D4D4D4"/>
                 </a:solidFill>
@@ -25557,7 +25740,7 @@
               <a:t>         </a:t>
             </a:r>
             <a:r>
-              <a:rPr sz="2000" i="0" b="0">
+              <a:rPr sz="1900" i="0" b="0">
                 <a:solidFill>
                   <a:srgbClr val="4EC9B0"/>
                 </a:solidFill>
@@ -25566,7 +25749,7 @@
               <a:t>CHAR</a:t>
             </a:r>
             <a:r>
-              <a:rPr sz="2000" i="0" b="0">
+              <a:rPr sz="1900" i="0" b="0">
                 <a:solidFill>
                   <a:srgbClr val="D4D4D4"/>
                 </a:solidFill>
@@ -25575,7 +25758,7 @@
               <a:t>(</a:t>
             </a:r>
             <a:r>
-              <a:rPr sz="2000" i="0" b="0">
+              <a:rPr sz="1900" i="0" b="0">
                 <a:solidFill>
                   <a:srgbClr val="B5CEA8"/>
                 </a:solidFill>
@@ -25584,7 +25767,7 @@
               <a:t>1</a:t>
             </a:r>
             <a:r>
-              <a:rPr sz="2000" i="0" b="0">
+              <a:rPr sz="1900" i="0" b="0">
                 <a:solidFill>
                   <a:srgbClr val="D4D4D4"/>
                 </a:solidFill>
@@ -25593,7 +25776,7 @@
               <a:t>) </a:t>
             </a:r>
             <a:r>
-              <a:rPr sz="2000" i="0" b="0">
+              <a:rPr sz="1900" i="0" b="0">
                 <a:solidFill>
                   <a:srgbClr val="569CD6"/>
                 </a:solidFill>
@@ -25602,7 +25785,7 @@
               <a:t>DEFAULT</a:t>
             </a:r>
             <a:r>
-              <a:rPr sz="2000" i="0" b="0">
+              <a:rPr sz="1900" i="0" b="0">
                 <a:solidFill>
                   <a:srgbClr val="D4D4D4"/>
                 </a:solidFill>
@@ -25611,7 +25794,7 @@
               <a:t> </a:t>
             </a:r>
             <a:r>
-              <a:rPr sz="2000" i="0" b="0">
+              <a:rPr sz="1900" i="0" b="0">
                 <a:solidFill>
                   <a:srgbClr val="CE9178"/>
                 </a:solidFill>
@@ -25620,7 +25803,7 @@
               <a:t>'S'</a:t>
             </a:r>
             <a:r>
-              <a:rPr sz="2000" i="0" b="0">
+              <a:rPr sz="1900" i="0" b="0">
                 <a:solidFill>
                   <a:srgbClr val="D4D4D4"/>
                 </a:solidFill>
@@ -25629,7 +25812,7 @@
               <a:t>      </a:t>
             </a:r>
             <a:r>
-              <a:rPr sz="2000" i="1" b="0">
+              <a:rPr sz="1900" i="1" b="0">
                 <a:solidFill>
                   <a:srgbClr val="6A9955"/>
                 </a:solidFill>
@@ -25641,11 +25824,11 @@
           <a:p>
             <a:pPr>
               <a:spcAft>
-                <a:spcPts val="428"/>
+                <a:spcPts val="407"/>
               </a:spcAft>
             </a:pPr>
             <a:r>
-              <a:rPr sz="2000" i="0" b="0">
+              <a:rPr sz="1900" i="0" b="0">
                 <a:solidFill>
                   <a:srgbClr val="D4D4D4"/>
                 </a:solidFill>
@@ -25654,7 +25837,7 @@
               <a:t>    </a:t>
             </a:r>
             <a:r>
-              <a:rPr sz="2000" i="0" b="0">
+              <a:rPr sz="1900" i="0" b="0">
                 <a:solidFill>
                   <a:srgbClr val="569CD6"/>
                 </a:solidFill>
@@ -25663,7 +25846,7 @@
               <a:t>CHECK</a:t>
             </a:r>
             <a:r>
-              <a:rPr sz="2000" i="0" b="0">
+              <a:rPr sz="1900" i="0" b="0">
                 <a:solidFill>
                   <a:srgbClr val="D4D4D4"/>
                 </a:solidFill>
@@ -25672,7 +25855,7 @@
               <a:t> (</a:t>
             </a:r>
             <a:r>
-              <a:rPr sz="2000" i="0" b="0">
+              <a:rPr sz="1900" i="0" b="0">
                 <a:solidFill>
                   <a:srgbClr val="D4D4D4"/>
                 </a:solidFill>
@@ -25681,7 +25864,7 @@
               <a:t>activo</a:t>
             </a:r>
             <a:r>
-              <a:rPr sz="2000" i="0" b="0">
+              <a:rPr sz="1900" i="0" b="0">
                 <a:solidFill>
                   <a:srgbClr val="D4D4D4"/>
                 </a:solidFill>
@@ -25690,7 +25873,7 @@
               <a:t> </a:t>
             </a:r>
             <a:r>
-              <a:rPr sz="2000" i="0" b="0">
+              <a:rPr sz="1900" i="0" b="0">
                 <a:solidFill>
                   <a:srgbClr val="569CD6"/>
                 </a:solidFill>
@@ -25699,7 +25882,7 @@
               <a:t>IN</a:t>
             </a:r>
             <a:r>
-              <a:rPr sz="2000" i="0" b="0">
+              <a:rPr sz="1900" i="0" b="0">
                 <a:solidFill>
                   <a:srgbClr val="D4D4D4"/>
                 </a:solidFill>
@@ -25708,7 +25891,7 @@
               <a:t> (</a:t>
             </a:r>
             <a:r>
-              <a:rPr sz="2000" i="0" b="0">
+              <a:rPr sz="1900" i="0" b="0">
                 <a:solidFill>
                   <a:srgbClr val="CE9178"/>
                 </a:solidFill>
@@ -25717,7 +25900,7 @@
               <a:t>'S'</a:t>
             </a:r>
             <a:r>
-              <a:rPr sz="2000" i="0" b="0">
+              <a:rPr sz="1900" i="0" b="0">
                 <a:solidFill>
                   <a:srgbClr val="D4D4D4"/>
                 </a:solidFill>
@@ -25726,7 +25909,7 @@
               <a:t>,</a:t>
             </a:r>
             <a:r>
-              <a:rPr sz="2000" i="0" b="0">
+              <a:rPr sz="1900" i="0" b="0">
                 <a:solidFill>
                   <a:srgbClr val="CE9178"/>
                 </a:solidFill>
@@ -25735,7 +25918,7 @@
               <a:t>'N'</a:t>
             </a:r>
             <a:r>
-              <a:rPr sz="2000" i="0" b="0">
+              <a:rPr sz="1900" i="0" b="0">
                 <a:solidFill>
                   <a:srgbClr val="D4D4D4"/>
                 </a:solidFill>
@@ -25747,11 +25930,11 @@
           <a:p>
             <a:pPr>
               <a:spcAft>
-                <a:spcPts val="428"/>
+                <a:spcPts val="407"/>
               </a:spcAft>
             </a:pPr>
             <a:r>
-              <a:rPr sz="2000" i="0" b="0">
+              <a:rPr sz="1900" i="0" b="0">
                 <a:solidFill>
                   <a:srgbClr val="D4D4D4"/>
                 </a:solidFill>

--- a/Bases de Datos II/Clases/Clase 1 - Revision BD I y modelo de datos/Presentacion.pptx
+++ b/Bases de Datos II/Clases/Clase 1 - Revision BD I y modelo de datos/Presentacion.pptx
@@ -2804,7 +2804,7 @@
           <a:p/>
           <a:p>
             <a:r>
-              <a:t>EJEMPLO: Decisión por relación: mascota → dueño, restrictiva (borrar un dueño no puede evaporar el historial); consulta → cita, restrictiva; detalle_factura → factura, CASCADE (una línea no significa nada sin su factura); detalle_factura → insumo, restrictiva (no se borra un insumo ya facturado).</a:t>
+              <a:t>EJEMPLO: Decisión por relación: mascota → dueño, restrictiva (borrar un dueño no puede borrar el historial); consulta → cita, restrictiva; detalle_factura → factura, CASCADE (una línea no significa nada sin su factura); detalle_factura → insumo, restrictiva (no se borra un insumo ya facturado).</a:t>
             </a:r>
           </a:p>
           <a:p/>
